--- a/output_pptx/Oceans_Where_Feet_May_Fail.pptx
+++ b/output_pptx/Oceans_Where_Feet_May_Fail.pptx
@@ -3123,8 +3123,8 @@
         </p:nvSpPr>
         <p:spPr>
           <a:xfrm>
-            <a:off x="594360" y="2258568"/>
-            <a:ext cx="11002975" cy="685800"/>
+            <a:off x="640080" y="2052828"/>
+            <a:ext cx="10911535" cy="731520"/>
           </a:xfrm>
           <a:prstGeom prst="rect">
             <a:avLst/>
@@ -3139,7 +3139,7 @@
           <a:p>
             <a:pPr algn="ctr"/>
             <a:r>
-              <a:rPr sz="4400" b="1" i="0">
+              <a:rPr sz="4800" b="1" i="0">
                 <a:solidFill>
                   <a:srgbClr val="FFFFFF"/>
                 </a:solidFill>
@@ -3158,8 +3158,8 @@
         </p:nvSpPr>
         <p:spPr>
           <a:xfrm>
-            <a:off x="594360" y="2980944"/>
-            <a:ext cx="11002975" cy="347472"/>
+            <a:off x="640080" y="2985516"/>
+            <a:ext cx="10911535" cy="731520"/>
           </a:xfrm>
           <a:prstGeom prst="rect">
             <a:avLst/>
@@ -3174,83 +3174,13 @@
           <a:p>
             <a:pPr algn="ctr"/>
             <a:r>
-              <a:rPr sz="2200" b="0" i="1">
-                <a:solidFill>
-                  <a:srgbClr val="8C8C8C"/>
-                </a:solidFill>
-                <a:latin typeface="Arial"/>
-              </a:rPr>
-              <a:t/>
-            </a:r>
-          </a:p>
-        </p:txBody>
-      </p:sp>
-      <p:sp>
-        <p:nvSpPr>
-          <p:cNvPr id="4" name="TextBox 3"/>
-          <p:cNvSpPr txBox="1"/>
-          <p:nvPr/>
-        </p:nvSpPr>
-        <p:spPr>
-          <a:xfrm>
-            <a:off x="594360" y="3529584"/>
-            <a:ext cx="11002975" cy="685800"/>
-          </a:xfrm>
-          <a:prstGeom prst="rect">
-            <a:avLst/>
-          </a:prstGeom>
-          <a:noFill/>
-        </p:spPr>
-        <p:txBody>
-          <a:bodyPr wrap="square">
-            <a:spAutoFit/>
-          </a:bodyPr>
-          <a:lstStyle/>
-          <a:p>
-            <a:pPr algn="ctr"/>
-            <a:r>
-              <a:rPr sz="4400" b="1" i="0">
+              <a:rPr sz="4800" b="1" i="0">
                 <a:solidFill>
                   <a:srgbClr val="FFFFFF"/>
                 </a:solidFill>
                 <a:latin typeface="Arial"/>
               </a:rPr>
               <a:t>Onde os meus pés podem falhar</a:t>
-            </a:r>
-          </a:p>
-        </p:txBody>
-      </p:sp>
-      <p:sp>
-        <p:nvSpPr>
-          <p:cNvPr id="5" name="TextBox 4"/>
-          <p:cNvSpPr txBox="1"/>
-          <p:nvPr/>
-        </p:nvSpPr>
-        <p:spPr>
-          <a:xfrm>
-            <a:off x="594360" y="4251960"/>
-            <a:ext cx="11002975" cy="347472"/>
-          </a:xfrm>
-          <a:prstGeom prst="rect">
-            <a:avLst/>
-          </a:prstGeom>
-          <a:noFill/>
-        </p:spPr>
-        <p:txBody>
-          <a:bodyPr wrap="square">
-            <a:spAutoFit/>
-          </a:bodyPr>
-          <a:lstStyle/>
-          <a:p>
-            <a:pPr algn="ctr"/>
-            <a:r>
-              <a:rPr sz="2200" b="0" i="1">
-                <a:solidFill>
-                  <a:srgbClr val="8C8C8C"/>
-                </a:solidFill>
-                <a:latin typeface="Arial"/>
-              </a:rPr>
-              <a:t/>
             </a:r>
           </a:p>
         </p:txBody>
@@ -3289,8 +3219,8 @@
         </p:nvSpPr>
         <p:spPr>
           <a:xfrm>
-            <a:off x="594360" y="2258568"/>
-            <a:ext cx="11002975" cy="685800"/>
+            <a:off x="640080" y="2052828"/>
+            <a:ext cx="10911535" cy="731520"/>
           </a:xfrm>
           <a:prstGeom prst="rect">
             <a:avLst/>
@@ -3305,7 +3235,7 @@
           <a:p>
             <a:pPr algn="ctr"/>
             <a:r>
-              <a:rPr sz="4400" b="1" i="0">
+              <a:rPr sz="4800" b="1" i="0">
                 <a:solidFill>
                   <a:srgbClr val="FFFFFF"/>
                 </a:solidFill>
@@ -3324,8 +3254,8 @@
         </p:nvSpPr>
         <p:spPr>
           <a:xfrm>
-            <a:off x="594360" y="2980944"/>
-            <a:ext cx="11002975" cy="347472"/>
+            <a:off x="640080" y="2985516"/>
+            <a:ext cx="10911535" cy="731520"/>
           </a:xfrm>
           <a:prstGeom prst="rect">
             <a:avLst/>
@@ -3340,83 +3270,13 @@
           <a:p>
             <a:pPr algn="ctr"/>
             <a:r>
-              <a:rPr sz="2200" b="0" i="1">
-                <a:solidFill>
-                  <a:srgbClr val="8C8C8C"/>
-                </a:solidFill>
-                <a:latin typeface="Arial"/>
-              </a:rPr>
-              <a:t/>
-            </a:r>
-          </a:p>
-        </p:txBody>
-      </p:sp>
-      <p:sp>
-        <p:nvSpPr>
-          <p:cNvPr id="4" name="TextBox 3"/>
-          <p:cNvSpPr txBox="1"/>
-          <p:nvPr/>
-        </p:nvSpPr>
-        <p:spPr>
-          <a:xfrm>
-            <a:off x="594360" y="3529584"/>
-            <a:ext cx="11002975" cy="685800"/>
-          </a:xfrm>
-          <a:prstGeom prst="rect">
-            <a:avLst/>
-          </a:prstGeom>
-          <a:noFill/>
-        </p:spPr>
-        <p:txBody>
-          <a:bodyPr wrap="square">
-            <a:spAutoFit/>
-          </a:bodyPr>
-          <a:lstStyle/>
-          <a:p>
-            <a:pPr algn="ctr"/>
-            <a:r>
-              <a:rPr sz="4400" b="1" i="0">
+              <a:rPr sz="4800" b="1" i="0">
                 <a:solidFill>
                   <a:srgbClr val="FFFFFF"/>
                 </a:solidFill>
                 <a:latin typeface="Arial"/>
               </a:rPr>
               <a:t>E além das ondas olharei</a:t>
-            </a:r>
-          </a:p>
-        </p:txBody>
-      </p:sp>
-      <p:sp>
-        <p:nvSpPr>
-          <p:cNvPr id="5" name="TextBox 4"/>
-          <p:cNvSpPr txBox="1"/>
-          <p:nvPr/>
-        </p:nvSpPr>
-        <p:spPr>
-          <a:xfrm>
-            <a:off x="594360" y="4251960"/>
-            <a:ext cx="11002975" cy="347472"/>
-          </a:xfrm>
-          <a:prstGeom prst="rect">
-            <a:avLst/>
-          </a:prstGeom>
-          <a:noFill/>
-        </p:spPr>
-        <p:txBody>
-          <a:bodyPr wrap="square">
-            <a:spAutoFit/>
-          </a:bodyPr>
-          <a:lstStyle/>
-          <a:p>
-            <a:pPr algn="ctr"/>
-            <a:r>
-              <a:rPr sz="2200" b="0" i="1">
-                <a:solidFill>
-                  <a:srgbClr val="8C8C8C"/>
-                </a:solidFill>
-                <a:latin typeface="Arial"/>
-              </a:rPr>
-              <a:t/>
             </a:r>
           </a:p>
         </p:txBody>
@@ -3455,8 +3315,8 @@
         </p:nvSpPr>
         <p:spPr>
           <a:xfrm>
-            <a:off x="594360" y="2258568"/>
-            <a:ext cx="11002975" cy="685800"/>
+            <a:off x="640080" y="2052828"/>
+            <a:ext cx="10911535" cy="731520"/>
           </a:xfrm>
           <a:prstGeom prst="rect">
             <a:avLst/>
@@ -3471,7 +3331,7 @@
           <a:p>
             <a:pPr algn="ctr"/>
             <a:r>
-              <a:rPr sz="4400" b="1" i="0">
+              <a:rPr sz="4800" b="1" i="0">
                 <a:solidFill>
                   <a:srgbClr val="FFFFFF"/>
                 </a:solidFill>
@@ -3490,8 +3350,8 @@
         </p:nvSpPr>
         <p:spPr>
           <a:xfrm>
-            <a:off x="594360" y="2980944"/>
-            <a:ext cx="11002975" cy="347472"/>
+            <a:off x="640080" y="2985516"/>
+            <a:ext cx="10911535" cy="731520"/>
           </a:xfrm>
           <a:prstGeom prst="rect">
             <a:avLst/>
@@ -3506,83 +3366,13 @@
           <a:p>
             <a:pPr algn="ctr"/>
             <a:r>
-              <a:rPr sz="2200" b="0" i="1">
-                <a:solidFill>
-                  <a:srgbClr val="8C8C8C"/>
-                </a:solidFill>
-                <a:latin typeface="Arial"/>
-              </a:rPr>
-              <a:t/>
-            </a:r>
-          </a:p>
-        </p:txBody>
-      </p:sp>
-      <p:sp>
-        <p:nvSpPr>
-          <p:cNvPr id="4" name="TextBox 3"/>
-          <p:cNvSpPr txBox="1"/>
-          <p:nvPr/>
-        </p:nvSpPr>
-        <p:spPr>
-          <a:xfrm>
-            <a:off x="594360" y="3529584"/>
-            <a:ext cx="11002975" cy="685800"/>
-          </a:xfrm>
-          <a:prstGeom prst="rect">
-            <a:avLst/>
-          </a:prstGeom>
-          <a:noFill/>
-        </p:spPr>
-        <p:txBody>
-          <a:bodyPr wrap="square">
-            <a:spAutoFit/>
-          </a:bodyPr>
-          <a:lstStyle/>
-          <a:p>
-            <a:pPr algn="ctr"/>
-            <a:r>
-              <a:rPr sz="4400" b="1" i="0">
+              <a:rPr sz="4800" b="1" i="0">
                 <a:solidFill>
                   <a:srgbClr val="FFFFFF"/>
                 </a:solidFill>
                 <a:latin typeface="Arial"/>
               </a:rPr>
               <a:t>Somente em Ti descansarei</a:t>
-            </a:r>
-          </a:p>
-        </p:txBody>
-      </p:sp>
-      <p:sp>
-        <p:nvSpPr>
-          <p:cNvPr id="5" name="TextBox 4"/>
-          <p:cNvSpPr txBox="1"/>
-          <p:nvPr/>
-        </p:nvSpPr>
-        <p:spPr>
-          <a:xfrm>
-            <a:off x="594360" y="4251960"/>
-            <a:ext cx="11002975" cy="347472"/>
-          </a:xfrm>
-          <a:prstGeom prst="rect">
-            <a:avLst/>
-          </a:prstGeom>
-          <a:noFill/>
-        </p:spPr>
-        <p:txBody>
-          <a:bodyPr wrap="square">
-            <a:spAutoFit/>
-          </a:bodyPr>
-          <a:lstStyle/>
-          <a:p>
-            <a:pPr algn="ctr"/>
-            <a:r>
-              <a:rPr sz="2200" b="0" i="1">
-                <a:solidFill>
-                  <a:srgbClr val="8C8C8C"/>
-                </a:solidFill>
-                <a:latin typeface="Arial"/>
-              </a:rPr>
-              <a:t/>
             </a:r>
           </a:p>
         </p:txBody>
@@ -3621,8 +3411,8 @@
         </p:nvSpPr>
         <p:spPr>
           <a:xfrm>
-            <a:off x="594360" y="2258568"/>
-            <a:ext cx="11002975" cy="685800"/>
+            <a:off x="640080" y="2052828"/>
+            <a:ext cx="10911535" cy="731520"/>
           </a:xfrm>
           <a:prstGeom prst="rect">
             <a:avLst/>
@@ -3637,7 +3427,7 @@
           <a:p>
             <a:pPr algn="ctr"/>
             <a:r>
-              <a:rPr sz="4400" b="1" i="0">
+              <a:rPr sz="4800" b="1" i="0">
                 <a:solidFill>
                   <a:srgbClr val="FFFFFF"/>
                 </a:solidFill>
@@ -3656,8 +3446,8 @@
         </p:nvSpPr>
         <p:spPr>
           <a:xfrm>
-            <a:off x="594360" y="2980944"/>
-            <a:ext cx="11002975" cy="347472"/>
+            <a:off x="640080" y="2985516"/>
+            <a:ext cx="10911535" cy="731520"/>
           </a:xfrm>
           <a:prstGeom prst="rect">
             <a:avLst/>
@@ -3672,83 +3462,13 @@
           <a:p>
             <a:pPr algn="ctr"/>
             <a:r>
-              <a:rPr sz="2200" b="0" i="1">
-                <a:solidFill>
-                  <a:srgbClr val="8C8C8C"/>
-                </a:solidFill>
-                <a:latin typeface="Arial"/>
-              </a:rPr>
-              <a:t/>
-            </a:r>
-          </a:p>
-        </p:txBody>
-      </p:sp>
-      <p:sp>
-        <p:nvSpPr>
-          <p:cNvPr id="4" name="TextBox 3"/>
-          <p:cNvSpPr txBox="1"/>
-          <p:nvPr/>
-        </p:nvSpPr>
-        <p:spPr>
-          <a:xfrm>
-            <a:off x="594360" y="3529584"/>
-            <a:ext cx="11002975" cy="685800"/>
-          </a:xfrm>
-          <a:prstGeom prst="rect">
-            <a:avLst/>
-          </a:prstGeom>
-          <a:noFill/>
-        </p:spPr>
-        <p:txBody>
-          <a:bodyPr wrap="square">
-            <a:spAutoFit/>
-          </a:bodyPr>
-          <a:lstStyle/>
-          <a:p>
-            <a:pPr algn="ctr"/>
-            <a:r>
-              <a:rPr sz="3911" b="1" i="0">
+              <a:rPr sz="4200" b="1" i="0">
                 <a:solidFill>
                   <a:srgbClr val="FFFFFF"/>
                 </a:solidFill>
                 <a:latin typeface="Arial"/>
               </a:rPr>
               <a:t>Guia-me pra que em tudo em Ti confie</a:t>
-            </a:r>
-          </a:p>
-        </p:txBody>
-      </p:sp>
-      <p:sp>
-        <p:nvSpPr>
-          <p:cNvPr id="5" name="TextBox 4"/>
-          <p:cNvSpPr txBox="1"/>
-          <p:nvPr/>
-        </p:nvSpPr>
-        <p:spPr>
-          <a:xfrm>
-            <a:off x="594360" y="4251960"/>
-            <a:ext cx="11002975" cy="347472"/>
-          </a:xfrm>
-          <a:prstGeom prst="rect">
-            <a:avLst/>
-          </a:prstGeom>
-          <a:noFill/>
-        </p:spPr>
-        <p:txBody>
-          <a:bodyPr wrap="square">
-            <a:spAutoFit/>
-          </a:bodyPr>
-          <a:lstStyle/>
-          <a:p>
-            <a:pPr algn="ctr"/>
-            <a:r>
-              <a:rPr sz="2200" b="0" i="1">
-                <a:solidFill>
-                  <a:srgbClr val="8C8C8C"/>
-                </a:solidFill>
-                <a:latin typeface="Arial"/>
-              </a:rPr>
-              <a:t/>
             </a:r>
           </a:p>
         </p:txBody>
@@ -3787,8 +3507,8 @@
         </p:nvSpPr>
         <p:spPr>
           <a:xfrm>
-            <a:off x="594360" y="1837944"/>
-            <a:ext cx="11002975" cy="685800"/>
+            <a:off x="640080" y="1650492"/>
+            <a:ext cx="10911535" cy="731520"/>
           </a:xfrm>
           <a:prstGeom prst="rect">
             <a:avLst/>
@@ -3803,7 +3523,7 @@
           <a:p>
             <a:pPr algn="ctr"/>
             <a:r>
-              <a:rPr sz="4400" b="1" i="0">
+              <a:rPr sz="4800" b="1" i="0">
                 <a:solidFill>
                   <a:srgbClr val="FFFFFF"/>
                 </a:solidFill>
@@ -3822,8 +3542,8 @@
         </p:nvSpPr>
         <p:spPr>
           <a:xfrm>
-            <a:off x="594360" y="2560320"/>
-            <a:ext cx="11002975" cy="384048"/>
+            <a:off x="640080" y="2418588"/>
+            <a:ext cx="10911535" cy="365760"/>
           </a:xfrm>
           <a:prstGeom prst="rect">
             <a:avLst/>
@@ -3840,7 +3560,7 @@
             <a:r>
               <a:rPr sz="2400" b="0" i="1">
                 <a:solidFill>
-                  <a:srgbClr val="B4B4B4"/>
+                  <a:srgbClr val="AAAAAA"/>
                 </a:solidFill>
                 <a:latin typeface="Arial"/>
               </a:rPr>
@@ -3857,8 +3577,8 @@
         </p:nvSpPr>
         <p:spPr>
           <a:xfrm>
-            <a:off x="594360" y="2980944"/>
-            <a:ext cx="11002975" cy="347472"/>
+            <a:off x="640080" y="2985516"/>
+            <a:ext cx="10911535" cy="731520"/>
           </a:xfrm>
           <a:prstGeom prst="rect">
             <a:avLst/>
@@ -3873,13 +3593,13 @@
           <a:p>
             <a:pPr algn="ctr"/>
             <a:r>
-              <a:rPr sz="2000" b="0" i="1">
-                <a:solidFill>
-                  <a:srgbClr val="8C8C8C"/>
+              <a:rPr sz="4800" b="1" i="0">
+                <a:solidFill>
+                  <a:srgbClr val="FFFFFF"/>
                 </a:solidFill>
                 <a:latin typeface="Arial"/>
               </a:rPr>
-              <a:t/>
+              <a:t>聖霊よ手を引いて  連れて行ってください</a:t>
             </a:r>
           </a:p>
         </p:txBody>
@@ -3892,8 +3612,8 @@
         </p:nvSpPr>
         <p:spPr>
           <a:xfrm>
-            <a:off x="594360" y="3529584"/>
-            <a:ext cx="11002975" cy="685800"/>
+            <a:off x="640080" y="3753612"/>
+            <a:ext cx="10911535" cy="365760"/>
           </a:xfrm>
           <a:prstGeom prst="rect">
             <a:avLst/>
@@ -3908,13 +3628,13 @@
           <a:p>
             <a:pPr algn="ctr"/>
             <a:r>
-              <a:rPr sz="4400" b="1" i="0">
-                <a:solidFill>
-                  <a:srgbClr val="FFFFFF"/>
+              <a:rPr sz="2400" b="0" i="1">
+                <a:solidFill>
+                  <a:srgbClr val="AAAAAA"/>
                 </a:solidFill>
                 <a:latin typeface="Arial"/>
               </a:rPr>
-              <a:t>聖霊よ手を引いて  連れて行ってください</a:t>
+              <a:t>seireiyo te wo hiite tsurete itte kudasai</a:t>
             </a:r>
           </a:p>
         </p:txBody>
@@ -3927,8 +3647,8 @@
         </p:nvSpPr>
         <p:spPr>
           <a:xfrm>
-            <a:off x="594360" y="4251960"/>
-            <a:ext cx="11002975" cy="384048"/>
+            <a:off x="640080" y="4530852"/>
+            <a:ext cx="10911535" cy="310896"/>
           </a:xfrm>
           <a:prstGeom prst="rect">
             <a:avLst/>
@@ -3943,13 +3663,13 @@
           <a:p>
             <a:pPr algn="ctr"/>
             <a:r>
-              <a:rPr sz="2400" b="0" i="1">
-                <a:solidFill>
-                  <a:srgbClr val="B4B4B4"/>
+              <a:rPr sz="2000" b="0" i="1">
+                <a:solidFill>
+                  <a:srgbClr val="828282"/>
                 </a:solidFill>
                 <a:latin typeface="Arial"/>
               </a:rPr>
-              <a:t>seireiyo te wo hiite tsurete itte kudasai</a:t>
+              <a:t>Se estou cercado pelo medo</a:t>
             </a:r>
           </a:p>
         </p:txBody>
@@ -3962,8 +3682,8 @@
         </p:nvSpPr>
         <p:spPr>
           <a:xfrm>
-            <a:off x="594360" y="4672584"/>
-            <a:ext cx="11002975" cy="347472"/>
+            <a:off x="640080" y="4896612"/>
+            <a:ext cx="10911535" cy="310896"/>
           </a:xfrm>
           <a:prstGeom prst="rect">
             <a:avLst/>
@@ -3980,11 +3700,11 @@
             <a:r>
               <a:rPr sz="2000" b="0" i="1">
                 <a:solidFill>
-                  <a:srgbClr val="8C8C8C"/>
+                  <a:srgbClr val="828282"/>
                 </a:solidFill>
                 <a:latin typeface="Arial"/>
               </a:rPr>
-              <a:t/>
+              <a:t>Tu és fiel, nunca vais falhar</a:t>
             </a:r>
           </a:p>
         </p:txBody>
@@ -4023,8 +3743,8 @@
         </p:nvSpPr>
         <p:spPr>
           <a:xfrm>
-            <a:off x="594360" y="1837944"/>
-            <a:ext cx="11002975" cy="685800"/>
+            <a:off x="640080" y="1650492"/>
+            <a:ext cx="10911535" cy="731520"/>
           </a:xfrm>
           <a:prstGeom prst="rect">
             <a:avLst/>
@@ -4039,7 +3759,7 @@
           <a:p>
             <a:pPr algn="ctr"/>
             <a:r>
-              <a:rPr sz="4400" b="1" i="0">
+              <a:rPr sz="4800" b="1" i="0">
                 <a:solidFill>
                   <a:srgbClr val="FFFFFF"/>
                 </a:solidFill>
@@ -4058,8 +3778,8 @@
         </p:nvSpPr>
         <p:spPr>
           <a:xfrm>
-            <a:off x="594360" y="2560320"/>
-            <a:ext cx="11002975" cy="384048"/>
+            <a:off x="640080" y="2418588"/>
+            <a:ext cx="10911535" cy="365760"/>
           </a:xfrm>
           <a:prstGeom prst="rect">
             <a:avLst/>
@@ -4076,7 +3796,7 @@
             <a:r>
               <a:rPr sz="2400" b="0" i="1">
                 <a:solidFill>
-                  <a:srgbClr val="B4B4B4"/>
+                  <a:srgbClr val="AAAAAA"/>
                 </a:solidFill>
                 <a:latin typeface="Arial"/>
               </a:rPr>
@@ -4093,8 +3813,8 @@
         </p:nvSpPr>
         <p:spPr>
           <a:xfrm>
-            <a:off x="594360" y="2980944"/>
-            <a:ext cx="11002975" cy="347472"/>
+            <a:off x="640080" y="2985516"/>
+            <a:ext cx="10911535" cy="731520"/>
           </a:xfrm>
           <a:prstGeom prst="rect">
             <a:avLst/>
@@ -4109,13 +3829,13 @@
           <a:p>
             <a:pPr algn="ctr"/>
             <a:r>
-              <a:rPr sz="2000" b="0" i="1">
-                <a:solidFill>
-                  <a:srgbClr val="8C8C8C"/>
+              <a:rPr sz="4800" b="1" i="0">
+                <a:solidFill>
+                  <a:srgbClr val="FFFFFF"/>
                 </a:solidFill>
                 <a:latin typeface="Arial"/>
               </a:rPr>
-              <a:t/>
+              <a:t>信仰をつよめ   臨在の中へ</a:t>
             </a:r>
           </a:p>
         </p:txBody>
@@ -4128,8 +3848,8 @@
         </p:nvSpPr>
         <p:spPr>
           <a:xfrm>
-            <a:off x="594360" y="3529584"/>
-            <a:ext cx="11002975" cy="685800"/>
+            <a:off x="640080" y="3753612"/>
+            <a:ext cx="10911535" cy="365760"/>
           </a:xfrm>
           <a:prstGeom prst="rect">
             <a:avLst/>
@@ -4144,13 +3864,13 @@
           <a:p>
             <a:pPr algn="ctr"/>
             <a:r>
-              <a:rPr sz="4400" b="1" i="0">
-                <a:solidFill>
-                  <a:srgbClr val="FFFFFF"/>
+              <a:rPr sz="2400" b="0" i="1">
+                <a:solidFill>
+                  <a:srgbClr val="AAAAAA"/>
                 </a:solidFill>
                 <a:latin typeface="Arial"/>
               </a:rPr>
-              <a:t>信仰をつよめ   臨在の中へ</a:t>
+              <a:t>shinkou wo tsuyome   rinzai no naka he</a:t>
             </a:r>
           </a:p>
         </p:txBody>
@@ -4163,8 +3883,8 @@
         </p:nvSpPr>
         <p:spPr>
           <a:xfrm>
-            <a:off x="594360" y="4251960"/>
-            <a:ext cx="11002975" cy="384048"/>
+            <a:off x="640080" y="4530852"/>
+            <a:ext cx="10911535" cy="310896"/>
           </a:xfrm>
           <a:prstGeom prst="rect">
             <a:avLst/>
@@ -4179,13 +3899,13 @@
           <a:p>
             <a:pPr algn="ctr"/>
             <a:r>
-              <a:rPr sz="2400" b="0" i="1">
-                <a:solidFill>
-                  <a:srgbClr val="B4B4B4"/>
+              <a:rPr sz="2000" b="0" i="1">
+                <a:solidFill>
+                  <a:srgbClr val="828282"/>
                 </a:solidFill>
                 <a:latin typeface="Arial"/>
               </a:rPr>
-              <a:t>shinkou wo tsuyome   rinzai no naka he</a:t>
+              <a:t>Ao Teu nome clamarei</a:t>
             </a:r>
           </a:p>
         </p:txBody>
@@ -4198,8 +3918,8 @@
         </p:nvSpPr>
         <p:spPr>
           <a:xfrm>
-            <a:off x="594360" y="4672584"/>
-            <a:ext cx="11002975" cy="347472"/>
+            <a:off x="640080" y="4896612"/>
+            <a:ext cx="10911535" cy="310896"/>
           </a:xfrm>
           <a:prstGeom prst="rect">
             <a:avLst/>
@@ -4216,11 +3936,11 @@
             <a:r>
               <a:rPr sz="2000" b="0" i="1">
                 <a:solidFill>
-                  <a:srgbClr val="8C8C8C"/>
+                  <a:srgbClr val="828282"/>
                 </a:solidFill>
                 <a:latin typeface="Arial"/>
               </a:rPr>
-              <a:t/>
+              <a:t>E além das ondas olharei</a:t>
             </a:r>
           </a:p>
         </p:txBody>
@@ -4259,8 +3979,8 @@
         </p:nvSpPr>
         <p:spPr>
           <a:xfrm>
-            <a:off x="594360" y="2258568"/>
-            <a:ext cx="11002975" cy="685800"/>
+            <a:off x="640080" y="2052828"/>
+            <a:ext cx="10911535" cy="731520"/>
           </a:xfrm>
           <a:prstGeom prst="rect">
             <a:avLst/>
@@ -4275,7 +3995,7 @@
           <a:p>
             <a:pPr algn="ctr"/>
             <a:r>
-              <a:rPr sz="4400" b="1" i="0">
+              <a:rPr sz="4800" b="1" i="0">
                 <a:solidFill>
                   <a:srgbClr val="FFFFFF"/>
                 </a:solidFill>
@@ -4294,8 +4014,8 @@
         </p:nvSpPr>
         <p:spPr>
           <a:xfrm>
-            <a:off x="594360" y="2980944"/>
-            <a:ext cx="11002975" cy="347472"/>
+            <a:off x="640080" y="2985516"/>
+            <a:ext cx="10911535" cy="731520"/>
           </a:xfrm>
           <a:prstGeom prst="rect">
             <a:avLst/>
@@ -4310,83 +4030,13 @@
           <a:p>
             <a:pPr algn="ctr"/>
             <a:r>
-              <a:rPr sz="2200" b="0" i="1">
-                <a:solidFill>
-                  <a:srgbClr val="8C8C8C"/>
-                </a:solidFill>
-                <a:latin typeface="Arial"/>
-              </a:rPr>
-              <a:t/>
-            </a:r>
-          </a:p>
-        </p:txBody>
-      </p:sp>
-      <p:sp>
-        <p:nvSpPr>
-          <p:cNvPr id="4" name="TextBox 3"/>
-          <p:cNvSpPr txBox="1"/>
-          <p:nvPr/>
-        </p:nvSpPr>
-        <p:spPr>
-          <a:xfrm>
-            <a:off x="594360" y="3529584"/>
-            <a:ext cx="11002975" cy="685800"/>
-          </a:xfrm>
-          <a:prstGeom prst="rect">
-            <a:avLst/>
-          </a:prstGeom>
-          <a:noFill/>
-        </p:spPr>
-        <p:txBody>
-          <a:bodyPr wrap="square">
-            <a:spAutoFit/>
-          </a:bodyPr>
-          <a:lstStyle/>
-          <a:p>
-            <a:pPr algn="ctr"/>
-            <a:r>
-              <a:rPr sz="4400" b="1" i="0">
+              <a:rPr sz="4800" b="1" i="0">
                 <a:solidFill>
                   <a:srgbClr val="FFFFFF"/>
                 </a:solidFill>
                 <a:latin typeface="Arial"/>
               </a:rPr>
               <a:t>Tu és fiel, nunca vais falhar</a:t>
-            </a:r>
-          </a:p>
-        </p:txBody>
-      </p:sp>
-      <p:sp>
-        <p:nvSpPr>
-          <p:cNvPr id="5" name="TextBox 4"/>
-          <p:cNvSpPr txBox="1"/>
-          <p:nvPr/>
-        </p:nvSpPr>
-        <p:spPr>
-          <a:xfrm>
-            <a:off x="594360" y="4251960"/>
-            <a:ext cx="11002975" cy="347472"/>
-          </a:xfrm>
-          <a:prstGeom prst="rect">
-            <a:avLst/>
-          </a:prstGeom>
-          <a:noFill/>
-        </p:spPr>
-        <p:txBody>
-          <a:bodyPr wrap="square">
-            <a:spAutoFit/>
-          </a:bodyPr>
-          <a:lstStyle/>
-          <a:p>
-            <a:pPr algn="ctr"/>
-            <a:r>
-              <a:rPr sz="2200" b="0" i="1">
-                <a:solidFill>
-                  <a:srgbClr val="8C8C8C"/>
-                </a:solidFill>
-                <a:latin typeface="Arial"/>
-              </a:rPr>
-              <a:t/>
             </a:r>
           </a:p>
         </p:txBody>
@@ -4425,8 +4075,8 @@
         </p:nvSpPr>
         <p:spPr>
           <a:xfrm>
-            <a:off x="594360" y="2258568"/>
-            <a:ext cx="11002975" cy="685800"/>
+            <a:off x="640080" y="2052828"/>
+            <a:ext cx="10911535" cy="731520"/>
           </a:xfrm>
           <a:prstGeom prst="rect">
             <a:avLst/>
@@ -4441,7 +4091,7 @@
           <a:p>
             <a:pPr algn="ctr"/>
             <a:r>
-              <a:rPr sz="4400" b="1" i="0">
+              <a:rPr sz="4800" b="1" i="0">
                 <a:solidFill>
                   <a:srgbClr val="FFFFFF"/>
                 </a:solidFill>
@@ -4460,8 +4110,8 @@
         </p:nvSpPr>
         <p:spPr>
           <a:xfrm>
-            <a:off x="594360" y="2980944"/>
-            <a:ext cx="11002975" cy="347472"/>
+            <a:off x="640080" y="2985516"/>
+            <a:ext cx="10911535" cy="731520"/>
           </a:xfrm>
           <a:prstGeom prst="rect">
             <a:avLst/>
@@ -4476,83 +4126,13 @@
           <a:p>
             <a:pPr algn="ctr"/>
             <a:r>
-              <a:rPr sz="2200" b="0" i="1">
-                <a:solidFill>
-                  <a:srgbClr val="8C8C8C"/>
-                </a:solidFill>
-                <a:latin typeface="Arial"/>
-              </a:rPr>
-              <a:t/>
-            </a:r>
-          </a:p>
-        </p:txBody>
-      </p:sp>
-      <p:sp>
-        <p:nvSpPr>
-          <p:cNvPr id="4" name="TextBox 3"/>
-          <p:cNvSpPr txBox="1"/>
-          <p:nvPr/>
-        </p:nvSpPr>
-        <p:spPr>
-          <a:xfrm>
-            <a:off x="594360" y="3529584"/>
-            <a:ext cx="11002975" cy="685800"/>
-          </a:xfrm>
-          <a:prstGeom prst="rect">
-            <a:avLst/>
-          </a:prstGeom>
-          <a:noFill/>
-        </p:spPr>
-        <p:txBody>
-          <a:bodyPr wrap="square">
-            <a:spAutoFit/>
-          </a:bodyPr>
-          <a:lstStyle/>
-          <a:p>
-            <a:pPr algn="ctr"/>
-            <a:r>
-              <a:rPr sz="4400" b="1" i="0">
+              <a:rPr sz="4800" b="1" i="0">
                 <a:solidFill>
                   <a:srgbClr val="FFFFFF"/>
                 </a:solidFill>
                 <a:latin typeface="Arial"/>
               </a:rPr>
               <a:t>E além das ondas olharei</a:t>
-            </a:r>
-          </a:p>
-        </p:txBody>
-      </p:sp>
-      <p:sp>
-        <p:nvSpPr>
-          <p:cNvPr id="5" name="TextBox 4"/>
-          <p:cNvSpPr txBox="1"/>
-          <p:nvPr/>
-        </p:nvSpPr>
-        <p:spPr>
-          <a:xfrm>
-            <a:off x="594360" y="4251960"/>
-            <a:ext cx="11002975" cy="347472"/>
-          </a:xfrm>
-          <a:prstGeom prst="rect">
-            <a:avLst/>
-          </a:prstGeom>
-          <a:noFill/>
-        </p:spPr>
-        <p:txBody>
-          <a:bodyPr wrap="square">
-            <a:spAutoFit/>
-          </a:bodyPr>
-          <a:lstStyle/>
-          <a:p>
-            <a:pPr algn="ctr"/>
-            <a:r>
-              <a:rPr sz="2200" b="0" i="1">
-                <a:solidFill>
-                  <a:srgbClr val="8C8C8C"/>
-                </a:solidFill>
-                <a:latin typeface="Arial"/>
-              </a:rPr>
-              <a:t/>
             </a:r>
           </a:p>
         </p:txBody>
@@ -4591,8 +4171,8 @@
         </p:nvSpPr>
         <p:spPr>
           <a:xfrm>
-            <a:off x="594360" y="2258568"/>
-            <a:ext cx="11002975" cy="685800"/>
+            <a:off x="640080" y="2052828"/>
+            <a:ext cx="10911535" cy="731520"/>
           </a:xfrm>
           <a:prstGeom prst="rect">
             <a:avLst/>
@@ -4607,7 +4187,7 @@
           <a:p>
             <a:pPr algn="ctr"/>
             <a:r>
-              <a:rPr sz="4400" b="1" i="0">
+              <a:rPr sz="4800" b="1" i="0">
                 <a:solidFill>
                   <a:srgbClr val="FFFFFF"/>
                 </a:solidFill>
@@ -4626,8 +4206,8 @@
         </p:nvSpPr>
         <p:spPr>
           <a:xfrm>
-            <a:off x="594360" y="2980944"/>
-            <a:ext cx="11002975" cy="347472"/>
+            <a:off x="640080" y="2985516"/>
+            <a:ext cx="10911535" cy="731520"/>
           </a:xfrm>
           <a:prstGeom prst="rect">
             <a:avLst/>
@@ -4642,83 +4222,13 @@
           <a:p>
             <a:pPr algn="ctr"/>
             <a:r>
-              <a:rPr sz="2200" b="0" i="1">
-                <a:solidFill>
-                  <a:srgbClr val="8C8C8C"/>
-                </a:solidFill>
-                <a:latin typeface="Arial"/>
-              </a:rPr>
-              <a:t/>
-            </a:r>
-          </a:p>
-        </p:txBody>
-      </p:sp>
-      <p:sp>
-        <p:nvSpPr>
-          <p:cNvPr id="4" name="TextBox 3"/>
-          <p:cNvSpPr txBox="1"/>
-          <p:nvPr/>
-        </p:nvSpPr>
-        <p:spPr>
-          <a:xfrm>
-            <a:off x="594360" y="3529584"/>
-            <a:ext cx="11002975" cy="685800"/>
-          </a:xfrm>
-          <a:prstGeom prst="rect">
-            <a:avLst/>
-          </a:prstGeom>
-          <a:noFill/>
-        </p:spPr>
-        <p:txBody>
-          <a:bodyPr wrap="square">
-            <a:spAutoFit/>
-          </a:bodyPr>
-          <a:lstStyle/>
-          <a:p>
-            <a:pPr algn="ctr"/>
-            <a:r>
-              <a:rPr sz="4400" b="1" i="0">
+              <a:rPr sz="4800" b="1" i="0">
                 <a:solidFill>
                   <a:srgbClr val="FFFFFF"/>
                 </a:solidFill>
                 <a:latin typeface="Arial"/>
               </a:rPr>
               <a:t>Somente em Ti descansarei</a:t>
-            </a:r>
-          </a:p>
-        </p:txBody>
-      </p:sp>
-      <p:sp>
-        <p:nvSpPr>
-          <p:cNvPr id="5" name="TextBox 4"/>
-          <p:cNvSpPr txBox="1"/>
-          <p:nvPr/>
-        </p:nvSpPr>
-        <p:spPr>
-          <a:xfrm>
-            <a:off x="594360" y="4251960"/>
-            <a:ext cx="11002975" cy="347472"/>
-          </a:xfrm>
-          <a:prstGeom prst="rect">
-            <a:avLst/>
-          </a:prstGeom>
-          <a:noFill/>
-        </p:spPr>
-        <p:txBody>
-          <a:bodyPr wrap="square">
-            <a:spAutoFit/>
-          </a:bodyPr>
-          <a:lstStyle/>
-          <a:p>
-            <a:pPr algn="ctr"/>
-            <a:r>
-              <a:rPr sz="2200" b="0" i="1">
-                <a:solidFill>
-                  <a:srgbClr val="8C8C8C"/>
-                </a:solidFill>
-                <a:latin typeface="Arial"/>
-              </a:rPr>
-              <a:t/>
             </a:r>
           </a:p>
         </p:txBody>
@@ -4757,8 +4267,8 @@
         </p:nvSpPr>
         <p:spPr>
           <a:xfrm>
-            <a:off x="594360" y="2258568"/>
-            <a:ext cx="11002975" cy="685800"/>
+            <a:off x="640080" y="2052828"/>
+            <a:ext cx="10911535" cy="731520"/>
           </a:xfrm>
           <a:prstGeom prst="rect">
             <a:avLst/>
@@ -4773,7 +4283,7 @@
           <a:p>
             <a:pPr algn="ctr"/>
             <a:r>
-              <a:rPr sz="4400" b="1" i="0">
+              <a:rPr sz="4800" b="1" i="0">
                 <a:solidFill>
                   <a:srgbClr val="FFFFFF"/>
                 </a:solidFill>
@@ -4792,8 +4302,8 @@
         </p:nvSpPr>
         <p:spPr>
           <a:xfrm>
-            <a:off x="594360" y="2980944"/>
-            <a:ext cx="11002975" cy="347472"/>
+            <a:off x="640080" y="2985516"/>
+            <a:ext cx="10911535" cy="731520"/>
           </a:xfrm>
           <a:prstGeom prst="rect">
             <a:avLst/>
@@ -4808,83 +4318,13 @@
           <a:p>
             <a:pPr algn="ctr"/>
             <a:r>
-              <a:rPr sz="2200" b="0" i="1">
-                <a:solidFill>
-                  <a:srgbClr val="8C8C8C"/>
-                </a:solidFill>
-                <a:latin typeface="Arial"/>
-              </a:rPr>
-              <a:t/>
-            </a:r>
-          </a:p>
-        </p:txBody>
-      </p:sp>
-      <p:sp>
-        <p:nvSpPr>
-          <p:cNvPr id="4" name="TextBox 3"/>
-          <p:cNvSpPr txBox="1"/>
-          <p:nvPr/>
-        </p:nvSpPr>
-        <p:spPr>
-          <a:xfrm>
-            <a:off x="594360" y="3529584"/>
-            <a:ext cx="11002975" cy="685800"/>
-          </a:xfrm>
-          <a:prstGeom prst="rect">
-            <a:avLst/>
-          </a:prstGeom>
-          <a:noFill/>
-        </p:spPr>
-        <p:txBody>
-          <a:bodyPr wrap="square">
-            <a:spAutoFit/>
-          </a:bodyPr>
-          <a:lstStyle/>
-          <a:p>
-            <a:pPr algn="ctr"/>
-            <a:r>
-              <a:rPr sz="3911" b="1" i="0">
+              <a:rPr sz="4200" b="1" i="0">
                 <a:solidFill>
                   <a:srgbClr val="FFFFFF"/>
                 </a:solidFill>
                 <a:latin typeface="Arial"/>
               </a:rPr>
               <a:t>Guia-me pra que em tudo em Ti confie</a:t>
-            </a:r>
-          </a:p>
-        </p:txBody>
-      </p:sp>
-      <p:sp>
-        <p:nvSpPr>
-          <p:cNvPr id="5" name="TextBox 4"/>
-          <p:cNvSpPr txBox="1"/>
-          <p:nvPr/>
-        </p:nvSpPr>
-        <p:spPr>
-          <a:xfrm>
-            <a:off x="594360" y="4251960"/>
-            <a:ext cx="11002975" cy="347472"/>
-          </a:xfrm>
-          <a:prstGeom prst="rect">
-            <a:avLst/>
-          </a:prstGeom>
-          <a:noFill/>
-        </p:spPr>
-        <p:txBody>
-          <a:bodyPr wrap="square">
-            <a:spAutoFit/>
-          </a:bodyPr>
-          <a:lstStyle/>
-          <a:p>
-            <a:pPr algn="ctr"/>
-            <a:r>
-              <a:rPr sz="2200" b="0" i="1">
-                <a:solidFill>
-                  <a:srgbClr val="8C8C8C"/>
-                </a:solidFill>
-                <a:latin typeface="Arial"/>
-              </a:rPr>
-              <a:t/>
             </a:r>
           </a:p>
         </p:txBody>
@@ -4923,8 +4363,8 @@
         </p:nvSpPr>
         <p:spPr>
           <a:xfrm>
-            <a:off x="594360" y="1837944"/>
-            <a:ext cx="11002975" cy="685800"/>
+            <a:off x="640080" y="1650492"/>
+            <a:ext cx="10911535" cy="731520"/>
           </a:xfrm>
           <a:prstGeom prst="rect">
             <a:avLst/>
@@ -4939,7 +4379,7 @@
           <a:p>
             <a:pPr algn="ctr"/>
             <a:r>
-              <a:rPr sz="4400" b="1" i="0">
+              <a:rPr sz="4800" b="1" i="0">
                 <a:solidFill>
                   <a:srgbClr val="FFFFFF"/>
                 </a:solidFill>
@@ -4958,8 +4398,8 @@
         </p:nvSpPr>
         <p:spPr>
           <a:xfrm>
-            <a:off x="594360" y="2560320"/>
-            <a:ext cx="11002975" cy="384048"/>
+            <a:off x="640080" y="2418588"/>
+            <a:ext cx="10911535" cy="365760"/>
           </a:xfrm>
           <a:prstGeom prst="rect">
             <a:avLst/>
@@ -4976,7 +4416,7 @@
             <a:r>
               <a:rPr sz="2400" b="0" i="1">
                 <a:solidFill>
-                  <a:srgbClr val="B4B4B4"/>
+                  <a:srgbClr val="AAAAAA"/>
                 </a:solidFill>
                 <a:latin typeface="Arial"/>
               </a:rPr>
@@ -4993,8 +4433,8 @@
         </p:nvSpPr>
         <p:spPr>
           <a:xfrm>
-            <a:off x="594360" y="2980944"/>
-            <a:ext cx="11002975" cy="347472"/>
+            <a:off x="640080" y="2985516"/>
+            <a:ext cx="10911535" cy="731520"/>
           </a:xfrm>
           <a:prstGeom prst="rect">
             <a:avLst/>
@@ -5009,9 +4449,79 @@
           <a:p>
             <a:pPr algn="ctr"/>
             <a:r>
+              <a:rPr sz="4800" b="1" i="0">
+                <a:solidFill>
+                  <a:srgbClr val="FFFFFF"/>
+                </a:solidFill>
+                <a:latin typeface="Arial"/>
+              </a:rPr>
+              <a:t>うねる波も あなたに抱かれ</a:t>
+            </a:r>
+          </a:p>
+        </p:txBody>
+      </p:sp>
+      <p:sp>
+        <p:nvSpPr>
+          <p:cNvPr id="5" name="TextBox 4"/>
+          <p:cNvSpPr txBox="1"/>
+          <p:nvPr/>
+        </p:nvSpPr>
+        <p:spPr>
+          <a:xfrm>
+            <a:off x="640080" y="3753612"/>
+            <a:ext cx="10911535" cy="365760"/>
+          </a:xfrm>
+          <a:prstGeom prst="rect">
+            <a:avLst/>
+          </a:prstGeom>
+          <a:noFill/>
+        </p:spPr>
+        <p:txBody>
+          <a:bodyPr wrap="square">
+            <a:spAutoFit/>
+          </a:bodyPr>
+          <a:lstStyle/>
+          <a:p>
+            <a:pPr algn="ctr"/>
+            <a:r>
+              <a:rPr sz="2400" b="0" i="1">
+                <a:solidFill>
+                  <a:srgbClr val="AAAAAA"/>
+                </a:solidFill>
+                <a:latin typeface="Arial"/>
+              </a:rPr>
+              <a:t>uneru nami mo  anata ni idakare</a:t>
+            </a:r>
+          </a:p>
+        </p:txBody>
+      </p:sp>
+      <p:sp>
+        <p:nvSpPr>
+          <p:cNvPr id="6" name="TextBox 5"/>
+          <p:cNvSpPr txBox="1"/>
+          <p:nvPr/>
+        </p:nvSpPr>
+        <p:spPr>
+          <a:xfrm>
+            <a:off x="640080" y="4530852"/>
+            <a:ext cx="10911535" cy="310896"/>
+          </a:xfrm>
+          <a:prstGeom prst="rect">
+            <a:avLst/>
+          </a:prstGeom>
+          <a:noFill/>
+        </p:spPr>
+        <p:txBody>
+          <a:bodyPr wrap="square">
+            <a:spAutoFit/>
+          </a:bodyPr>
+          <a:lstStyle/>
+          <a:p>
+            <a:pPr algn="ctr"/>
+            <a:r>
               <a:rPr sz="2000" b="0" i="1">
                 <a:solidFill>
-                  <a:srgbClr val="8C8C8C"/>
+                  <a:srgbClr val="828282"/>
                 </a:solidFill>
                 <a:latin typeface="Arial"/>
               </a:rPr>
@@ -5022,14 +4532,14 @@
       </p:sp>
       <p:sp>
         <p:nvSpPr>
-          <p:cNvPr id="5" name="TextBox 4"/>
+          <p:cNvPr id="7" name="TextBox 6"/>
           <p:cNvSpPr txBox="1"/>
           <p:nvPr/>
         </p:nvSpPr>
         <p:spPr>
           <a:xfrm>
-            <a:off x="594360" y="3529584"/>
-            <a:ext cx="11002975" cy="685800"/>
+            <a:off x="640080" y="4896612"/>
+            <a:ext cx="10911535" cy="310896"/>
           </a:xfrm>
           <a:prstGeom prst="rect">
             <a:avLst/>
@@ -5044,79 +4554,9 @@
           <a:p>
             <a:pPr algn="ctr"/>
             <a:r>
-              <a:rPr sz="4400" b="1" i="0">
-                <a:solidFill>
-                  <a:srgbClr val="FFFFFF"/>
-                </a:solidFill>
-                <a:latin typeface="Arial"/>
-              </a:rPr>
-              <a:t>うねる波も あなたに抱かれ</a:t>
-            </a:r>
-          </a:p>
-        </p:txBody>
-      </p:sp>
-      <p:sp>
-        <p:nvSpPr>
-          <p:cNvPr id="6" name="TextBox 5"/>
-          <p:cNvSpPr txBox="1"/>
-          <p:nvPr/>
-        </p:nvSpPr>
-        <p:spPr>
-          <a:xfrm>
-            <a:off x="594360" y="4251960"/>
-            <a:ext cx="11002975" cy="384048"/>
-          </a:xfrm>
-          <a:prstGeom prst="rect">
-            <a:avLst/>
-          </a:prstGeom>
-          <a:noFill/>
-        </p:spPr>
-        <p:txBody>
-          <a:bodyPr wrap="square">
-            <a:spAutoFit/>
-          </a:bodyPr>
-          <a:lstStyle/>
-          <a:p>
-            <a:pPr algn="ctr"/>
-            <a:r>
-              <a:rPr sz="2400" b="0" i="1">
-                <a:solidFill>
-                  <a:srgbClr val="B4B4B4"/>
-                </a:solidFill>
-                <a:latin typeface="Arial"/>
-              </a:rPr>
-              <a:t>uneru nami mo  anata ni idakare</a:t>
-            </a:r>
-          </a:p>
-        </p:txBody>
-      </p:sp>
-      <p:sp>
-        <p:nvSpPr>
-          <p:cNvPr id="7" name="TextBox 6"/>
-          <p:cNvSpPr txBox="1"/>
-          <p:nvPr/>
-        </p:nvSpPr>
-        <p:spPr>
-          <a:xfrm>
-            <a:off x="594360" y="4672584"/>
-            <a:ext cx="11002975" cy="347472"/>
-          </a:xfrm>
-          <a:prstGeom prst="rect">
-            <a:avLst/>
-          </a:prstGeom>
-          <a:noFill/>
-        </p:spPr>
-        <p:txBody>
-          <a:bodyPr wrap="square">
-            <a:spAutoFit/>
-          </a:bodyPr>
-          <a:lstStyle/>
-          <a:p>
-            <a:pPr algn="ctr"/>
-            <a:r>
               <a:rPr sz="2000" b="0" i="1">
                 <a:solidFill>
-                  <a:srgbClr val="8C8C8C"/>
+                  <a:srgbClr val="828282"/>
                 </a:solidFill>
                 <a:latin typeface="Arial"/>
               </a:rPr>
@@ -5159,8 +4599,8 @@
         </p:nvSpPr>
         <p:spPr>
           <a:xfrm>
-            <a:off x="594360" y="2258568"/>
-            <a:ext cx="11002975" cy="685800"/>
+            <a:off x="640080" y="2052828"/>
+            <a:ext cx="10911535" cy="731520"/>
           </a:xfrm>
           <a:prstGeom prst="rect">
             <a:avLst/>
@@ -5175,7 +4615,7 @@
           <a:p>
             <a:pPr algn="ctr"/>
             <a:r>
-              <a:rPr sz="4400" b="1" i="0">
+              <a:rPr sz="4800" b="1" i="0">
                 <a:solidFill>
                   <a:srgbClr val="FFFFFF"/>
                 </a:solidFill>
@@ -5194,8 +4634,8 @@
         </p:nvSpPr>
         <p:spPr>
           <a:xfrm>
-            <a:off x="594360" y="2980944"/>
-            <a:ext cx="11002975" cy="347472"/>
+            <a:off x="640080" y="2985516"/>
+            <a:ext cx="10911535" cy="731520"/>
           </a:xfrm>
           <a:prstGeom prst="rect">
             <a:avLst/>
@@ -5210,83 +4650,13 @@
           <a:p>
             <a:pPr algn="ctr"/>
             <a:r>
-              <a:rPr sz="2200" b="0" i="1">
-                <a:solidFill>
-                  <a:srgbClr val="8C8C8C"/>
-                </a:solidFill>
-                <a:latin typeface="Arial"/>
-              </a:rPr>
-              <a:t/>
-            </a:r>
-          </a:p>
-        </p:txBody>
-      </p:sp>
-      <p:sp>
-        <p:nvSpPr>
-          <p:cNvPr id="4" name="TextBox 3"/>
-          <p:cNvSpPr txBox="1"/>
-          <p:nvPr/>
-        </p:nvSpPr>
-        <p:spPr>
-          <a:xfrm>
-            <a:off x="594360" y="3529584"/>
-            <a:ext cx="11002975" cy="685800"/>
-          </a:xfrm>
-          <a:prstGeom prst="rect">
-            <a:avLst/>
-          </a:prstGeom>
-          <a:noFill/>
-        </p:spPr>
-        <p:txBody>
-          <a:bodyPr wrap="square">
-            <a:spAutoFit/>
-          </a:bodyPr>
-          <a:lstStyle/>
-          <a:p>
-            <a:pPr algn="ctr"/>
-            <a:r>
-              <a:rPr sz="4400" b="1" i="0">
+              <a:rPr sz="4800" b="1" i="0">
                 <a:solidFill>
                   <a:srgbClr val="FFFFFF"/>
                 </a:solidFill>
                 <a:latin typeface="Arial"/>
               </a:rPr>
               <a:t>Em meio ao mar, confiarei</a:t>
-            </a:r>
-          </a:p>
-        </p:txBody>
-      </p:sp>
-      <p:sp>
-        <p:nvSpPr>
-          <p:cNvPr id="5" name="TextBox 4"/>
-          <p:cNvSpPr txBox="1"/>
-          <p:nvPr/>
-        </p:nvSpPr>
-        <p:spPr>
-          <a:xfrm>
-            <a:off x="594360" y="4251960"/>
-            <a:ext cx="11002975" cy="347472"/>
-          </a:xfrm>
-          <a:prstGeom prst="rect">
-            <a:avLst/>
-          </a:prstGeom>
-          <a:noFill/>
-        </p:spPr>
-        <p:txBody>
-          <a:bodyPr wrap="square">
-            <a:spAutoFit/>
-          </a:bodyPr>
-          <a:lstStyle/>
-          <a:p>
-            <a:pPr algn="ctr"/>
-            <a:r>
-              <a:rPr sz="2200" b="0" i="1">
-                <a:solidFill>
-                  <a:srgbClr val="8C8C8C"/>
-                </a:solidFill>
-                <a:latin typeface="Arial"/>
-              </a:rPr>
-              <a:t/>
             </a:r>
           </a:p>
         </p:txBody>
@@ -5325,8 +4695,8 @@
         </p:nvSpPr>
         <p:spPr>
           <a:xfrm>
-            <a:off x="594360" y="2683764"/>
-            <a:ext cx="11002975" cy="685800"/>
+            <a:off x="640080" y="2500884"/>
+            <a:ext cx="10911535" cy="731520"/>
           </a:xfrm>
           <a:prstGeom prst="rect">
             <a:avLst/>
@@ -5341,7 +4711,7 @@
           <a:p>
             <a:pPr algn="ctr"/>
             <a:r>
-              <a:rPr sz="4400" b="1" i="0">
+              <a:rPr sz="4800" b="1" i="0">
                 <a:solidFill>
                   <a:srgbClr val="FFFFFF"/>
                 </a:solidFill>
@@ -5360,8 +4730,8 @@
         </p:nvSpPr>
         <p:spPr>
           <a:xfrm>
-            <a:off x="594360" y="3406140"/>
-            <a:ext cx="11002975" cy="384048"/>
+            <a:off x="640080" y="3268980"/>
+            <a:ext cx="10911535" cy="365760"/>
           </a:xfrm>
           <a:prstGeom prst="rect">
             <a:avLst/>
@@ -5378,7 +4748,7 @@
             <a:r>
               <a:rPr sz="2400" b="0" i="1">
                 <a:solidFill>
-                  <a:srgbClr val="B4B4B4"/>
+                  <a:srgbClr val="AAAAAA"/>
                 </a:solidFill>
                 <a:latin typeface="Arial"/>
               </a:rPr>
@@ -5395,8 +4765,8 @@
         </p:nvSpPr>
         <p:spPr>
           <a:xfrm>
-            <a:off x="594360" y="3826764"/>
-            <a:ext cx="11002975" cy="347472"/>
+            <a:off x="640080" y="4046220"/>
+            <a:ext cx="10911535" cy="310896"/>
           </a:xfrm>
           <a:prstGeom prst="rect">
             <a:avLst/>
@@ -5413,7 +4783,7 @@
             <a:r>
               <a:rPr sz="2000" b="0" i="1">
                 <a:solidFill>
-                  <a:srgbClr val="8C8C8C"/>
+                  <a:srgbClr val="828282"/>
                 </a:solidFill>
                 <a:latin typeface="Arial"/>
               </a:rPr>
@@ -5456,8 +4826,8 @@
         </p:nvSpPr>
         <p:spPr>
           <a:xfrm>
-            <a:off x="594360" y="2258568"/>
-            <a:ext cx="11002975" cy="685800"/>
+            <a:off x="640080" y="2052828"/>
+            <a:ext cx="10911535" cy="731520"/>
           </a:xfrm>
           <a:prstGeom prst="rect">
             <a:avLst/>
@@ -5472,7 +4842,7 @@
           <a:p>
             <a:pPr algn="ctr"/>
             <a:r>
-              <a:rPr sz="4400" b="1" i="0">
+              <a:rPr sz="4800" b="1" i="0">
                 <a:solidFill>
                   <a:srgbClr val="FFFFFF"/>
                 </a:solidFill>
@@ -5491,8 +4861,8 @@
         </p:nvSpPr>
         <p:spPr>
           <a:xfrm>
-            <a:off x="594360" y="2980944"/>
-            <a:ext cx="11002975" cy="347472"/>
+            <a:off x="640080" y="2985516"/>
+            <a:ext cx="10911535" cy="731520"/>
           </a:xfrm>
           <a:prstGeom prst="rect">
             <a:avLst/>
@@ -5507,9 +4877,44 @@
           <a:p>
             <a:pPr algn="ctr"/>
             <a:r>
-              <a:rPr sz="2200" b="0" i="1">
-                <a:solidFill>
-                  <a:srgbClr val="8C8C8C"/>
+              <a:rPr sz="4800" b="1" i="0">
+                <a:solidFill>
+                  <a:srgbClr val="FFFFFF"/>
+                </a:solidFill>
+                <a:latin typeface="Arial"/>
+              </a:rPr>
+              <a:t>E além das ondas olharei</a:t>
+            </a:r>
+          </a:p>
+        </p:txBody>
+      </p:sp>
+      <p:sp>
+        <p:nvSpPr>
+          <p:cNvPr id="4" name="TextBox 3"/>
+          <p:cNvSpPr txBox="1"/>
+          <p:nvPr/>
+        </p:nvSpPr>
+        <p:spPr>
+          <a:xfrm>
+            <a:off x="640080" y="4128516"/>
+            <a:ext cx="10911535" cy="310896"/>
+          </a:xfrm>
+          <a:prstGeom prst="rect">
+            <a:avLst/>
+          </a:prstGeom>
+          <a:noFill/>
+        </p:spPr>
+        <p:txBody>
+          <a:bodyPr wrap="square">
+            <a:spAutoFit/>
+          </a:bodyPr>
+          <a:lstStyle/>
+          <a:p>
+            <a:pPr algn="ctr"/>
+            <a:r>
+              <a:rPr sz="2000" b="0" i="0">
+                <a:solidFill>
+                  <a:srgbClr val="828282"/>
                 </a:solidFill>
                 <a:latin typeface="Arial"/>
               </a:rPr>
@@ -5520,14 +4925,14 @@
       </p:sp>
       <p:sp>
         <p:nvSpPr>
-          <p:cNvPr id="4" name="TextBox 3"/>
+          <p:cNvPr id="5" name="TextBox 4"/>
           <p:cNvSpPr txBox="1"/>
           <p:nvPr/>
         </p:nvSpPr>
         <p:spPr>
           <a:xfrm>
-            <a:off x="594360" y="3529584"/>
-            <a:ext cx="11002975" cy="685800"/>
+            <a:off x="640080" y="4494276"/>
+            <a:ext cx="10911535" cy="310896"/>
           </a:xfrm>
           <a:prstGeom prst="rect">
             <a:avLst/>
@@ -5542,44 +4947,9 @@
           <a:p>
             <a:pPr algn="ctr"/>
             <a:r>
-              <a:rPr sz="4400" b="1" i="0">
-                <a:solidFill>
-                  <a:srgbClr val="FFFFFF"/>
-                </a:solidFill>
-                <a:latin typeface="Arial"/>
-              </a:rPr>
-              <a:t>E além das ondas olharei</a:t>
-            </a:r>
-          </a:p>
-        </p:txBody>
-      </p:sp>
-      <p:sp>
-        <p:nvSpPr>
-          <p:cNvPr id="5" name="TextBox 4"/>
-          <p:cNvSpPr txBox="1"/>
-          <p:nvPr/>
-        </p:nvSpPr>
-        <p:spPr>
-          <a:xfrm>
-            <a:off x="594360" y="4251960"/>
-            <a:ext cx="11002975" cy="347472"/>
-          </a:xfrm>
-          <a:prstGeom prst="rect">
-            <a:avLst/>
-          </a:prstGeom>
-          <a:noFill/>
-        </p:spPr>
-        <p:txBody>
-          <a:bodyPr wrap="square">
-            <a:spAutoFit/>
-          </a:bodyPr>
-          <a:lstStyle/>
-          <a:p>
-            <a:pPr algn="ctr"/>
-            <a:r>
-              <a:rPr sz="2200" b="0" i="1">
-                <a:solidFill>
-                  <a:srgbClr val="8C8C8C"/>
+              <a:rPr sz="2000" b="0" i="0">
+                <a:solidFill>
+                  <a:srgbClr val="828282"/>
                 </a:solidFill>
                 <a:latin typeface="Arial"/>
               </a:rPr>
@@ -5622,8 +4992,8 @@
         </p:nvSpPr>
         <p:spPr>
           <a:xfrm>
-            <a:off x="594360" y="2258568"/>
-            <a:ext cx="11002975" cy="685800"/>
+            <a:off x="640080" y="2052828"/>
+            <a:ext cx="10911535" cy="731520"/>
           </a:xfrm>
           <a:prstGeom prst="rect">
             <a:avLst/>
@@ -5638,7 +5008,7 @@
           <a:p>
             <a:pPr algn="ctr"/>
             <a:r>
-              <a:rPr sz="4400" b="1" i="0">
+              <a:rPr sz="4800" b="1" i="0">
                 <a:solidFill>
                   <a:srgbClr val="FFFFFF"/>
                 </a:solidFill>
@@ -5657,8 +5027,8 @@
         </p:nvSpPr>
         <p:spPr>
           <a:xfrm>
-            <a:off x="594360" y="2980944"/>
-            <a:ext cx="11002975" cy="347472"/>
+            <a:off x="640080" y="2985516"/>
+            <a:ext cx="10911535" cy="731520"/>
           </a:xfrm>
           <a:prstGeom prst="rect">
             <a:avLst/>
@@ -5673,83 +5043,48 @@
           <a:p>
             <a:pPr algn="ctr"/>
             <a:r>
-              <a:rPr sz="2200" b="0" i="1">
-                <a:solidFill>
-                  <a:srgbClr val="8C8C8C"/>
+              <a:rPr sz="4800" b="1" i="0">
+                <a:solidFill>
+                  <a:srgbClr val="FFFFFF"/>
+                </a:solidFill>
+                <a:latin typeface="Arial"/>
+              </a:rPr>
+              <a:t>Somente em Ti descansarei</a:t>
+            </a:r>
+          </a:p>
+        </p:txBody>
+      </p:sp>
+      <p:sp>
+        <p:nvSpPr>
+          <p:cNvPr id="4" name="TextBox 3"/>
+          <p:cNvSpPr txBox="1"/>
+          <p:nvPr/>
+        </p:nvSpPr>
+        <p:spPr>
+          <a:xfrm>
+            <a:off x="640080" y="4128516"/>
+            <a:ext cx="10911535" cy="310896"/>
+          </a:xfrm>
+          <a:prstGeom prst="rect">
+            <a:avLst/>
+          </a:prstGeom>
+          <a:noFill/>
+        </p:spPr>
+        <p:txBody>
+          <a:bodyPr wrap="square">
+            <a:spAutoFit/>
+          </a:bodyPr>
+          <a:lstStyle/>
+          <a:p>
+            <a:pPr algn="ctr"/>
+            <a:r>
+              <a:rPr sz="2000" b="0" i="0">
+                <a:solidFill>
+                  <a:srgbClr val="828282"/>
                 </a:solidFill>
                 <a:latin typeface="Arial"/>
               </a:rPr>
               <a:t>越えて行こ う</a:t>
-            </a:r>
-          </a:p>
-        </p:txBody>
-      </p:sp>
-      <p:sp>
-        <p:nvSpPr>
-          <p:cNvPr id="4" name="TextBox 3"/>
-          <p:cNvSpPr txBox="1"/>
-          <p:nvPr/>
-        </p:nvSpPr>
-        <p:spPr>
-          <a:xfrm>
-            <a:off x="594360" y="3529584"/>
-            <a:ext cx="11002975" cy="685800"/>
-          </a:xfrm>
-          <a:prstGeom prst="rect">
-            <a:avLst/>
-          </a:prstGeom>
-          <a:noFill/>
-        </p:spPr>
-        <p:txBody>
-          <a:bodyPr wrap="square">
-            <a:spAutoFit/>
-          </a:bodyPr>
-          <a:lstStyle/>
-          <a:p>
-            <a:pPr algn="ctr"/>
-            <a:r>
-              <a:rPr sz="4400" b="1" i="0">
-                <a:solidFill>
-                  <a:srgbClr val="FFFFFF"/>
-                </a:solidFill>
-                <a:latin typeface="Arial"/>
-              </a:rPr>
-              <a:t>Somente em Ti descansarei</a:t>
-            </a:r>
-          </a:p>
-        </p:txBody>
-      </p:sp>
-      <p:sp>
-        <p:nvSpPr>
-          <p:cNvPr id="5" name="TextBox 4"/>
-          <p:cNvSpPr txBox="1"/>
-          <p:nvPr/>
-        </p:nvSpPr>
-        <p:spPr>
-          <a:xfrm>
-            <a:off x="594360" y="4251960"/>
-            <a:ext cx="11002975" cy="347472"/>
-          </a:xfrm>
-          <a:prstGeom prst="rect">
-            <a:avLst/>
-          </a:prstGeom>
-          <a:noFill/>
-        </p:spPr>
-        <p:txBody>
-          <a:bodyPr wrap="square">
-            <a:spAutoFit/>
-          </a:bodyPr>
-          <a:lstStyle/>
-          <a:p>
-            <a:pPr algn="ctr"/>
-            <a:r>
-              <a:rPr sz="2200" b="0" i="1">
-                <a:solidFill>
-                  <a:srgbClr val="8C8C8C"/>
-                </a:solidFill>
-                <a:latin typeface="Arial"/>
-              </a:rPr>
-              <a:t/>
             </a:r>
           </a:p>
         </p:txBody>
@@ -5788,8 +5123,8 @@
         </p:nvSpPr>
         <p:spPr>
           <a:xfrm>
-            <a:off x="594360" y="2894076"/>
-            <a:ext cx="11002975" cy="685800"/>
+            <a:off x="640080" y="2702052"/>
+            <a:ext cx="10911535" cy="731520"/>
           </a:xfrm>
           <a:prstGeom prst="rect">
             <a:avLst/>
@@ -5804,48 +5139,13 @@
           <a:p>
             <a:pPr algn="ctr"/>
             <a:r>
-              <a:rPr sz="4400" b="1" i="0">
+              <a:rPr sz="4800" b="1" i="0">
                 <a:solidFill>
                   <a:srgbClr val="FFFFFF"/>
                 </a:solidFill>
                 <a:latin typeface="Arial"/>
               </a:rPr>
               <a:t>Pois eu sou Teu e Tu és meu</a:t>
-            </a:r>
-          </a:p>
-        </p:txBody>
-      </p:sp>
-      <p:sp>
-        <p:nvSpPr>
-          <p:cNvPr id="3" name="TextBox 2"/>
-          <p:cNvSpPr txBox="1"/>
-          <p:nvPr/>
-        </p:nvSpPr>
-        <p:spPr>
-          <a:xfrm>
-            <a:off x="594360" y="3616452"/>
-            <a:ext cx="11002975" cy="347472"/>
-          </a:xfrm>
-          <a:prstGeom prst="rect">
-            <a:avLst/>
-          </a:prstGeom>
-          <a:noFill/>
-        </p:spPr>
-        <p:txBody>
-          <a:bodyPr wrap="square">
-            <a:spAutoFit/>
-          </a:bodyPr>
-          <a:lstStyle/>
-          <a:p>
-            <a:pPr algn="ctr"/>
-            <a:r>
-              <a:rPr sz="2200" b="0" i="1">
-                <a:solidFill>
-                  <a:srgbClr val="8C8C8C"/>
-                </a:solidFill>
-                <a:latin typeface="Arial"/>
-              </a:rPr>
-              <a:t/>
             </a:r>
           </a:p>
         </p:txBody>
@@ -5884,8 +5184,8 @@
         </p:nvSpPr>
         <p:spPr>
           <a:xfrm>
-            <a:off x="594360" y="2258568"/>
-            <a:ext cx="11002975" cy="685800"/>
+            <a:off x="640080" y="2052828"/>
+            <a:ext cx="10911535" cy="731520"/>
           </a:xfrm>
           <a:prstGeom prst="rect">
             <a:avLst/>
@@ -5900,7 +5200,7 @@
           <a:p>
             <a:pPr algn="ctr"/>
             <a:r>
-              <a:rPr sz="4400" b="1" i="0">
+              <a:rPr sz="4800" b="1" i="0">
                 <a:solidFill>
                   <a:srgbClr val="FFFFFF"/>
                 </a:solidFill>
@@ -5919,8 +5219,8 @@
         </p:nvSpPr>
         <p:spPr>
           <a:xfrm>
-            <a:off x="594360" y="2980944"/>
-            <a:ext cx="11002975" cy="347472"/>
+            <a:off x="640080" y="2985516"/>
+            <a:ext cx="10911535" cy="731520"/>
           </a:xfrm>
           <a:prstGeom prst="rect">
             <a:avLst/>
@@ -5935,9 +5235,44 @@
           <a:p>
             <a:pPr algn="ctr"/>
             <a:r>
-              <a:rPr sz="2200" b="0" i="1">
-                <a:solidFill>
-                  <a:srgbClr val="8C8C8C"/>
+              <a:rPr sz="4800" b="1" i="0">
+                <a:solidFill>
+                  <a:srgbClr val="FFFFFF"/>
+                </a:solidFill>
+                <a:latin typeface="Arial"/>
+              </a:rPr>
+              <a:t>E além das ondas olharei</a:t>
+            </a:r>
+          </a:p>
+        </p:txBody>
+      </p:sp>
+      <p:sp>
+        <p:nvSpPr>
+          <p:cNvPr id="4" name="TextBox 3"/>
+          <p:cNvSpPr txBox="1"/>
+          <p:nvPr/>
+        </p:nvSpPr>
+        <p:spPr>
+          <a:xfrm>
+            <a:off x="640080" y="4128516"/>
+            <a:ext cx="10911535" cy="310896"/>
+          </a:xfrm>
+          <a:prstGeom prst="rect">
+            <a:avLst/>
+          </a:prstGeom>
+          <a:noFill/>
+        </p:spPr>
+        <p:txBody>
+          <a:bodyPr wrap="square">
+            <a:spAutoFit/>
+          </a:bodyPr>
+          <a:lstStyle/>
+          <a:p>
+            <a:pPr algn="ctr"/>
+            <a:r>
+              <a:rPr sz="2000" b="0" i="0">
+                <a:solidFill>
+                  <a:srgbClr val="828282"/>
                 </a:solidFill>
                 <a:latin typeface="Arial"/>
               </a:rPr>
@@ -5948,14 +5283,14 @@
       </p:sp>
       <p:sp>
         <p:nvSpPr>
-          <p:cNvPr id="4" name="TextBox 3"/>
+          <p:cNvPr id="5" name="TextBox 4"/>
           <p:cNvSpPr txBox="1"/>
           <p:nvPr/>
         </p:nvSpPr>
         <p:spPr>
           <a:xfrm>
-            <a:off x="594360" y="3529584"/>
-            <a:ext cx="11002975" cy="685800"/>
+            <a:off x="640080" y="4494276"/>
+            <a:ext cx="10911535" cy="310896"/>
           </a:xfrm>
           <a:prstGeom prst="rect">
             <a:avLst/>
@@ -5970,44 +5305,9 @@
           <a:p>
             <a:pPr algn="ctr"/>
             <a:r>
-              <a:rPr sz="4400" b="1" i="0">
-                <a:solidFill>
-                  <a:srgbClr val="FFFFFF"/>
-                </a:solidFill>
-                <a:latin typeface="Arial"/>
-              </a:rPr>
-              <a:t>E além das ondas olharei</a:t>
-            </a:r>
-          </a:p>
-        </p:txBody>
-      </p:sp>
-      <p:sp>
-        <p:nvSpPr>
-          <p:cNvPr id="5" name="TextBox 4"/>
-          <p:cNvSpPr txBox="1"/>
-          <p:nvPr/>
-        </p:nvSpPr>
-        <p:spPr>
-          <a:xfrm>
-            <a:off x="594360" y="4251960"/>
-            <a:ext cx="11002975" cy="347472"/>
-          </a:xfrm>
-          <a:prstGeom prst="rect">
-            <a:avLst/>
-          </a:prstGeom>
-          <a:noFill/>
-        </p:spPr>
-        <p:txBody>
-          <a:bodyPr wrap="square">
-            <a:spAutoFit/>
-          </a:bodyPr>
-          <a:lstStyle/>
-          <a:p>
-            <a:pPr algn="ctr"/>
-            <a:r>
-              <a:rPr sz="2200" b="0" i="1">
-                <a:solidFill>
-                  <a:srgbClr val="8C8C8C"/>
+              <a:rPr sz="2000" b="0" i="0">
+                <a:solidFill>
+                  <a:srgbClr val="828282"/>
                 </a:solidFill>
                 <a:latin typeface="Arial"/>
               </a:rPr>
@@ -6050,8 +5350,8 @@
         </p:nvSpPr>
         <p:spPr>
           <a:xfrm>
-            <a:off x="594360" y="2258568"/>
-            <a:ext cx="11002975" cy="685800"/>
+            <a:off x="640080" y="2052828"/>
+            <a:ext cx="10911535" cy="731520"/>
           </a:xfrm>
           <a:prstGeom prst="rect">
             <a:avLst/>
@@ -6066,7 +5366,7 @@
           <a:p>
             <a:pPr algn="ctr"/>
             <a:r>
-              <a:rPr sz="4400" b="1" i="0">
+              <a:rPr sz="4800" b="1" i="0">
                 <a:solidFill>
                   <a:srgbClr val="FFFFFF"/>
                 </a:solidFill>
@@ -6085,8 +5385,8 @@
         </p:nvSpPr>
         <p:spPr>
           <a:xfrm>
-            <a:off x="594360" y="2980944"/>
-            <a:ext cx="11002975" cy="347472"/>
+            <a:off x="640080" y="2985516"/>
+            <a:ext cx="10911535" cy="731520"/>
           </a:xfrm>
           <a:prstGeom prst="rect">
             <a:avLst/>
@@ -6101,83 +5401,48 @@
           <a:p>
             <a:pPr algn="ctr"/>
             <a:r>
-              <a:rPr sz="2200" b="0" i="1">
-                <a:solidFill>
-                  <a:srgbClr val="8C8C8C"/>
+              <a:rPr sz="4800" b="1" i="0">
+                <a:solidFill>
+                  <a:srgbClr val="FFFFFF"/>
+                </a:solidFill>
+                <a:latin typeface="Arial"/>
+              </a:rPr>
+              <a:t>Somente em Ti descansarei</a:t>
+            </a:r>
+          </a:p>
+        </p:txBody>
+      </p:sp>
+      <p:sp>
+        <p:nvSpPr>
+          <p:cNvPr id="4" name="TextBox 3"/>
+          <p:cNvSpPr txBox="1"/>
+          <p:nvPr/>
+        </p:nvSpPr>
+        <p:spPr>
+          <a:xfrm>
+            <a:off x="640080" y="4128516"/>
+            <a:ext cx="10911535" cy="310896"/>
+          </a:xfrm>
+          <a:prstGeom prst="rect">
+            <a:avLst/>
+          </a:prstGeom>
+          <a:noFill/>
+        </p:spPr>
+        <p:txBody>
+          <a:bodyPr wrap="square">
+            <a:spAutoFit/>
+          </a:bodyPr>
+          <a:lstStyle/>
+          <a:p>
+            <a:pPr algn="ctr"/>
+            <a:r>
+              <a:rPr sz="2000" b="0" i="0">
+                <a:solidFill>
+                  <a:srgbClr val="828282"/>
                 </a:solidFill>
                 <a:latin typeface="Arial"/>
               </a:rPr>
               <a:t>越えて行こ う</a:t>
-            </a:r>
-          </a:p>
-        </p:txBody>
-      </p:sp>
-      <p:sp>
-        <p:nvSpPr>
-          <p:cNvPr id="4" name="TextBox 3"/>
-          <p:cNvSpPr txBox="1"/>
-          <p:nvPr/>
-        </p:nvSpPr>
-        <p:spPr>
-          <a:xfrm>
-            <a:off x="594360" y="3529584"/>
-            <a:ext cx="11002975" cy="685800"/>
-          </a:xfrm>
-          <a:prstGeom prst="rect">
-            <a:avLst/>
-          </a:prstGeom>
-          <a:noFill/>
-        </p:spPr>
-        <p:txBody>
-          <a:bodyPr wrap="square">
-            <a:spAutoFit/>
-          </a:bodyPr>
-          <a:lstStyle/>
-          <a:p>
-            <a:pPr algn="ctr"/>
-            <a:r>
-              <a:rPr sz="4400" b="1" i="0">
-                <a:solidFill>
-                  <a:srgbClr val="FFFFFF"/>
-                </a:solidFill>
-                <a:latin typeface="Arial"/>
-              </a:rPr>
-              <a:t>Somente em Ti descansarei</a:t>
-            </a:r>
-          </a:p>
-        </p:txBody>
-      </p:sp>
-      <p:sp>
-        <p:nvSpPr>
-          <p:cNvPr id="5" name="TextBox 4"/>
-          <p:cNvSpPr txBox="1"/>
-          <p:nvPr/>
-        </p:nvSpPr>
-        <p:spPr>
-          <a:xfrm>
-            <a:off x="594360" y="4251960"/>
-            <a:ext cx="11002975" cy="347472"/>
-          </a:xfrm>
-          <a:prstGeom prst="rect">
-            <a:avLst/>
-          </a:prstGeom>
-          <a:noFill/>
-        </p:spPr>
-        <p:txBody>
-          <a:bodyPr wrap="square">
-            <a:spAutoFit/>
-          </a:bodyPr>
-          <a:lstStyle/>
-          <a:p>
-            <a:pPr algn="ctr"/>
-            <a:r>
-              <a:rPr sz="2200" b="0" i="1">
-                <a:solidFill>
-                  <a:srgbClr val="8C8C8C"/>
-                </a:solidFill>
-                <a:latin typeface="Arial"/>
-              </a:rPr>
-              <a:t/>
             </a:r>
           </a:p>
         </p:txBody>
@@ -6216,8 +5481,8 @@
         </p:nvSpPr>
         <p:spPr>
           <a:xfrm>
-            <a:off x="594360" y="2894076"/>
-            <a:ext cx="11002975" cy="685800"/>
+            <a:off x="640080" y="2702052"/>
+            <a:ext cx="10911535" cy="731520"/>
           </a:xfrm>
           <a:prstGeom prst="rect">
             <a:avLst/>
@@ -6232,48 +5497,13 @@
           <a:p>
             <a:pPr algn="ctr"/>
             <a:r>
-              <a:rPr sz="4400" b="1" i="0">
+              <a:rPr sz="4800" b="1" i="0">
                 <a:solidFill>
                   <a:srgbClr val="FFFFFF"/>
                 </a:solidFill>
                 <a:latin typeface="Arial"/>
               </a:rPr>
               <a:t>Pois eu sou Teu e Tu és meu</a:t>
-            </a:r>
-          </a:p>
-        </p:txBody>
-      </p:sp>
-      <p:sp>
-        <p:nvSpPr>
-          <p:cNvPr id="3" name="TextBox 2"/>
-          <p:cNvSpPr txBox="1"/>
-          <p:nvPr/>
-        </p:nvSpPr>
-        <p:spPr>
-          <a:xfrm>
-            <a:off x="594360" y="3616452"/>
-            <a:ext cx="11002975" cy="347472"/>
-          </a:xfrm>
-          <a:prstGeom prst="rect">
-            <a:avLst/>
-          </a:prstGeom>
-          <a:noFill/>
-        </p:spPr>
-        <p:txBody>
-          <a:bodyPr wrap="square">
-            <a:spAutoFit/>
-          </a:bodyPr>
-          <a:lstStyle/>
-          <a:p>
-            <a:pPr algn="ctr"/>
-            <a:r>
-              <a:rPr sz="2200" b="0" i="1">
-                <a:solidFill>
-                  <a:srgbClr val="8C8C8C"/>
-                </a:solidFill>
-                <a:latin typeface="Arial"/>
-              </a:rPr>
-              <a:t/>
             </a:r>
           </a:p>
         </p:txBody>
@@ -6312,8 +5542,8 @@
         </p:nvSpPr>
         <p:spPr>
           <a:xfrm>
-            <a:off x="594360" y="2258568"/>
-            <a:ext cx="11002975" cy="685800"/>
+            <a:off x="640080" y="2052828"/>
+            <a:ext cx="10911535" cy="731520"/>
           </a:xfrm>
           <a:prstGeom prst="rect">
             <a:avLst/>
@@ -6328,7 +5558,7 @@
           <a:p>
             <a:pPr algn="ctr"/>
             <a:r>
-              <a:rPr sz="4400" b="1" i="0">
+              <a:rPr sz="4800" b="1" i="0">
                 <a:solidFill>
                   <a:srgbClr val="FFFFFF"/>
                 </a:solidFill>
@@ -6347,8 +5577,8 @@
         </p:nvSpPr>
         <p:spPr>
           <a:xfrm>
-            <a:off x="594360" y="2980944"/>
-            <a:ext cx="11002975" cy="347472"/>
+            <a:off x="640080" y="2985516"/>
+            <a:ext cx="10911535" cy="731520"/>
           </a:xfrm>
           <a:prstGeom prst="rect">
             <a:avLst/>
@@ -6363,83 +5593,13 @@
           <a:p>
             <a:pPr algn="ctr"/>
             <a:r>
-              <a:rPr sz="2200" b="0" i="1">
-                <a:solidFill>
-                  <a:srgbClr val="8C8C8C"/>
-                </a:solidFill>
-                <a:latin typeface="Arial"/>
-              </a:rPr>
-              <a:t/>
-            </a:r>
-          </a:p>
-        </p:txBody>
-      </p:sp>
-      <p:sp>
-        <p:nvSpPr>
-          <p:cNvPr id="4" name="TextBox 3"/>
-          <p:cNvSpPr txBox="1"/>
-          <p:nvPr/>
-        </p:nvSpPr>
-        <p:spPr>
-          <a:xfrm>
-            <a:off x="594360" y="3529584"/>
-            <a:ext cx="11002975" cy="685800"/>
-          </a:xfrm>
-          <a:prstGeom prst="rect">
-            <a:avLst/>
-          </a:prstGeom>
-          <a:noFill/>
-        </p:spPr>
-        <p:txBody>
-          <a:bodyPr wrap="square">
-            <a:spAutoFit/>
-          </a:bodyPr>
-          <a:lstStyle/>
-          <a:p>
-            <a:pPr algn="ctr"/>
-            <a:r>
-              <a:rPr sz="4400" b="1" i="0">
+              <a:rPr sz="4800" b="1" i="0">
                 <a:solidFill>
                   <a:srgbClr val="FFFFFF"/>
                 </a:solidFill>
                 <a:latin typeface="Arial"/>
               </a:rPr>
               <a:t>Tu és fiel, nunca vais falhar</a:t>
-            </a:r>
-          </a:p>
-        </p:txBody>
-      </p:sp>
-      <p:sp>
-        <p:nvSpPr>
-          <p:cNvPr id="5" name="TextBox 4"/>
-          <p:cNvSpPr txBox="1"/>
-          <p:nvPr/>
-        </p:nvSpPr>
-        <p:spPr>
-          <a:xfrm>
-            <a:off x="594360" y="4251960"/>
-            <a:ext cx="11002975" cy="347472"/>
-          </a:xfrm>
-          <a:prstGeom prst="rect">
-            <a:avLst/>
-          </a:prstGeom>
-          <a:noFill/>
-        </p:spPr>
-        <p:txBody>
-          <a:bodyPr wrap="square">
-            <a:spAutoFit/>
-          </a:bodyPr>
-          <a:lstStyle/>
-          <a:p>
-            <a:pPr algn="ctr"/>
-            <a:r>
-              <a:rPr sz="2200" b="0" i="1">
-                <a:solidFill>
-                  <a:srgbClr val="8C8C8C"/>
-                </a:solidFill>
-                <a:latin typeface="Arial"/>
-              </a:rPr>
-              <a:t/>
             </a:r>
           </a:p>
         </p:txBody>

--- a/output_pptx/Oceans_Where_Feet_May_Fail.pptx
+++ b/output_pptx/Oceans_Where_Feet_May_Fail.pptx
@@ -3185,6 +3185,76 @@
           </a:p>
         </p:txBody>
       </p:sp>
+      <p:sp>
+        <p:nvSpPr>
+          <p:cNvPr id="4" name="TextBox 3"/>
+          <p:cNvSpPr txBox="1"/>
+          <p:nvPr/>
+        </p:nvSpPr>
+        <p:spPr>
+          <a:xfrm>
+            <a:off x="640080" y="4128516"/>
+            <a:ext cx="10911535" cy="310896"/>
+          </a:xfrm>
+          <a:prstGeom prst="rect">
+            <a:avLst/>
+          </a:prstGeom>
+          <a:noFill/>
+        </p:spPr>
+        <p:txBody>
+          <a:bodyPr wrap="square">
+            <a:spAutoFit/>
+          </a:bodyPr>
+          <a:lstStyle/>
+          <a:p>
+            <a:pPr algn="ctr"/>
+            <a:r>
+              <a:rPr sz="2000" b="0" i="0">
+                <a:solidFill>
+                  <a:srgbClr val="828282"/>
+                </a:solidFill>
+                <a:latin typeface="Arial"/>
+              </a:rPr>
+              <a:t>あなたの声が水の上で私を呼んでいる</a:t>
+            </a:r>
+          </a:p>
+        </p:txBody>
+      </p:sp>
+      <p:sp>
+        <p:nvSpPr>
+          <p:cNvPr id="5" name="TextBox 4"/>
+          <p:cNvSpPr txBox="1"/>
+          <p:nvPr/>
+        </p:nvSpPr>
+        <p:spPr>
+          <a:xfrm>
+            <a:off x="640080" y="4494276"/>
+            <a:ext cx="10911535" cy="310896"/>
+          </a:xfrm>
+          <a:prstGeom prst="rect">
+            <a:avLst/>
+          </a:prstGeom>
+          <a:noFill/>
+        </p:spPr>
+        <p:txBody>
+          <a:bodyPr wrap="square">
+            <a:spAutoFit/>
+          </a:bodyPr>
+          <a:lstStyle/>
+          <a:p>
+            <a:pPr algn="ctr"/>
+            <a:r>
+              <a:rPr sz="2000" b="0" i="0">
+                <a:solidFill>
+                  <a:srgbClr val="828282"/>
+                </a:solidFill>
+                <a:latin typeface="Arial"/>
+              </a:rPr>
+              <a:t>私の足が失敗するかもしれない場所で</a:t>
+            </a:r>
+          </a:p>
+        </p:txBody>
+      </p:sp>
     </p:spTree>
   </p:cSld>
   <p:clrMapOvr>
@@ -3281,6 +3351,76 @@
           </a:p>
         </p:txBody>
       </p:sp>
+      <p:sp>
+        <p:nvSpPr>
+          <p:cNvPr id="4" name="TextBox 3"/>
+          <p:cNvSpPr txBox="1"/>
+          <p:nvPr/>
+        </p:nvSpPr>
+        <p:spPr>
+          <a:xfrm>
+            <a:off x="640080" y="4128516"/>
+            <a:ext cx="10911535" cy="310896"/>
+          </a:xfrm>
+          <a:prstGeom prst="rect">
+            <a:avLst/>
+          </a:prstGeom>
+          <a:noFill/>
+        </p:spPr>
+        <p:txBody>
+          <a:bodyPr wrap="square">
+            <a:spAutoFit/>
+          </a:bodyPr>
+          <a:lstStyle/>
+          <a:p>
+            <a:pPr algn="ctr"/>
+            <a:r>
+              <a:rPr sz="2000" b="0" i="0">
+                <a:solidFill>
+                  <a:srgbClr val="828282"/>
+                </a:solidFill>
+                <a:latin typeface="Arial"/>
+              </a:rPr>
+              <a:t>あなたの名前に叫びます</a:t>
+            </a:r>
+          </a:p>
+        </p:txBody>
+      </p:sp>
+      <p:sp>
+        <p:nvSpPr>
+          <p:cNvPr id="5" name="TextBox 4"/>
+          <p:cNvSpPr txBox="1"/>
+          <p:nvPr/>
+        </p:nvSpPr>
+        <p:spPr>
+          <a:xfrm>
+            <a:off x="640080" y="4494276"/>
+            <a:ext cx="10911535" cy="310896"/>
+          </a:xfrm>
+          <a:prstGeom prst="rect">
+            <a:avLst/>
+          </a:prstGeom>
+          <a:noFill/>
+        </p:spPr>
+        <p:txBody>
+          <a:bodyPr wrap="square">
+            <a:spAutoFit/>
+          </a:bodyPr>
+          <a:lstStyle/>
+          <a:p>
+            <a:pPr algn="ctr"/>
+            <a:r>
+              <a:rPr sz="2000" b="0" i="0">
+                <a:solidFill>
+                  <a:srgbClr val="828282"/>
+                </a:solidFill>
+                <a:latin typeface="Arial"/>
+              </a:rPr>
+              <a:t>波を超えて見つめます</a:t>
+            </a:r>
+          </a:p>
+        </p:txBody>
+      </p:sp>
     </p:spTree>
   </p:cSld>
   <p:clrMapOvr>
@@ -3377,6 +3517,76 @@
           </a:p>
         </p:txBody>
       </p:sp>
+      <p:sp>
+        <p:nvSpPr>
+          <p:cNvPr id="4" name="TextBox 3"/>
+          <p:cNvSpPr txBox="1"/>
+          <p:nvPr/>
+        </p:nvSpPr>
+        <p:spPr>
+          <a:xfrm>
+            <a:off x="640080" y="4128516"/>
+            <a:ext cx="10911535" cy="310896"/>
+          </a:xfrm>
+          <a:prstGeom prst="rect">
+            <a:avLst/>
+          </a:prstGeom>
+          <a:noFill/>
+        </p:spPr>
+        <p:txBody>
+          <a:bodyPr wrap="square">
+            <a:spAutoFit/>
+          </a:bodyPr>
+          <a:lstStyle/>
+          <a:p>
+            <a:pPr algn="ctr"/>
+            <a:r>
+              <a:rPr sz="2000" b="0" i="0">
+                <a:solidFill>
+                  <a:srgbClr val="828282"/>
+                </a:solidFill>
+                <a:latin typeface="Arial"/>
+              </a:rPr>
+              <a:t>もし海が増し増しになっても</a:t>
+            </a:r>
+          </a:p>
+        </p:txBody>
+      </p:sp>
+      <p:sp>
+        <p:nvSpPr>
+          <p:cNvPr id="5" name="TextBox 4"/>
+          <p:cNvSpPr txBox="1"/>
+          <p:nvPr/>
+        </p:nvSpPr>
+        <p:spPr>
+          <a:xfrm>
+            <a:off x="640080" y="4494276"/>
+            <a:ext cx="10911535" cy="310896"/>
+          </a:xfrm>
+          <a:prstGeom prst="rect">
+            <a:avLst/>
+          </a:prstGeom>
+          <a:noFill/>
+        </p:spPr>
+        <p:txBody>
+          <a:bodyPr wrap="square">
+            <a:spAutoFit/>
+          </a:bodyPr>
+          <a:lstStyle/>
+          <a:p>
+            <a:pPr algn="ctr"/>
+            <a:r>
+              <a:rPr sz="2000" b="0" i="0">
+                <a:solidFill>
+                  <a:srgbClr val="828282"/>
+                </a:solidFill>
+                <a:latin typeface="Arial"/>
+              </a:rPr>
+              <a:t>あなたの中にのみ安らぎます</a:t>
+            </a:r>
+          </a:p>
+        </p:txBody>
+      </p:sp>
     </p:spTree>
   </p:cSld>
   <p:clrMapOvr>
@@ -3473,6 +3683,76 @@
           </a:p>
         </p:txBody>
       </p:sp>
+      <p:sp>
+        <p:nvSpPr>
+          <p:cNvPr id="4" name="TextBox 3"/>
+          <p:cNvSpPr txBox="1"/>
+          <p:nvPr/>
+        </p:nvSpPr>
+        <p:spPr>
+          <a:xfrm>
+            <a:off x="640080" y="4128516"/>
+            <a:ext cx="10911535" cy="310896"/>
+          </a:xfrm>
+          <a:prstGeom prst="rect">
+            <a:avLst/>
+          </a:prstGeom>
+          <a:noFill/>
+        </p:spPr>
+        <p:txBody>
+          <a:bodyPr wrap="square">
+            <a:spAutoFit/>
+          </a:bodyPr>
+          <a:lstStyle/>
+          <a:p>
+            <a:pPr algn="ctr"/>
+            <a:r>
+              <a:rPr sz="2000" b="0" i="0">
+                <a:solidFill>
+                  <a:srgbClr val="828282"/>
+                </a:solidFill>
+                <a:latin typeface="Arial"/>
+              </a:rPr>
+              <a:t>私はあなたのもの、あなたは私のもの</a:t>
+            </a:r>
+          </a:p>
+        </p:txBody>
+      </p:sp>
+      <p:sp>
+        <p:nvSpPr>
+          <p:cNvPr id="5" name="TextBox 4"/>
+          <p:cNvSpPr txBox="1"/>
+          <p:nvPr/>
+        </p:nvSpPr>
+        <p:spPr>
+          <a:xfrm>
+            <a:off x="640080" y="4494276"/>
+            <a:ext cx="10911535" cy="310896"/>
+          </a:xfrm>
+          <a:prstGeom prst="rect">
+            <a:avLst/>
+          </a:prstGeom>
+          <a:noFill/>
+        </p:spPr>
+        <p:txBody>
+          <a:bodyPr wrap="square">
+            <a:spAutoFit/>
+          </a:bodyPr>
+          <a:lstStyle/>
+          <a:p>
+            <a:pPr algn="ctr"/>
+            <a:r>
+              <a:rPr sz="2000" b="0" i="0">
+                <a:solidFill>
+                  <a:srgbClr val="828282"/>
+                </a:solidFill>
+                <a:latin typeface="Arial"/>
+              </a:rPr>
+              <a:t>すべてであなたを信じるよう私を導いてください</a:t>
+            </a:r>
+          </a:p>
+        </p:txBody>
+      </p:sp>
     </p:spTree>
   </p:cSld>
   <p:clrMapOvr>
@@ -4041,6 +4321,76 @@
           </a:p>
         </p:txBody>
       </p:sp>
+      <p:sp>
+        <p:nvSpPr>
+          <p:cNvPr id="4" name="TextBox 3"/>
+          <p:cNvSpPr txBox="1"/>
+          <p:nvPr/>
+        </p:nvSpPr>
+        <p:spPr>
+          <a:xfrm>
+            <a:off x="640080" y="4128516"/>
+            <a:ext cx="10911535" cy="310896"/>
+          </a:xfrm>
+          <a:prstGeom prst="rect">
+            <a:avLst/>
+          </a:prstGeom>
+          <a:noFill/>
+        </p:spPr>
+        <p:txBody>
+          <a:bodyPr wrap="square">
+            <a:spAutoFit/>
+          </a:bodyPr>
+          <a:lstStyle/>
+          <a:p>
+            <a:pPr algn="ctr"/>
+            <a:r>
+              <a:rPr sz="2000" b="0" i="0">
+                <a:solidFill>
+                  <a:srgbClr val="828282"/>
+                </a:solidFill>
+                <a:latin typeface="Arial"/>
+              </a:rPr>
+              <a:t>もし恐れに囲まれていても</a:t>
+            </a:r>
+          </a:p>
+        </p:txBody>
+      </p:sp>
+      <p:sp>
+        <p:nvSpPr>
+          <p:cNvPr id="5" name="TextBox 4"/>
+          <p:cNvSpPr txBox="1"/>
+          <p:nvPr/>
+        </p:nvSpPr>
+        <p:spPr>
+          <a:xfrm>
+            <a:off x="640080" y="4494276"/>
+            <a:ext cx="10911535" cy="310896"/>
+          </a:xfrm>
+          <a:prstGeom prst="rect">
+            <a:avLst/>
+          </a:prstGeom>
+          <a:noFill/>
+        </p:spPr>
+        <p:txBody>
+          <a:bodyPr wrap="square">
+            <a:spAutoFit/>
+          </a:bodyPr>
+          <a:lstStyle/>
+          <a:p>
+            <a:pPr algn="ctr"/>
+            <a:r>
+              <a:rPr sz="2000" b="0" i="0">
+                <a:solidFill>
+                  <a:srgbClr val="828282"/>
+                </a:solidFill>
+                <a:latin typeface="Arial"/>
+              </a:rPr>
+              <a:t>あなたは真実で、決して失敗しない</a:t>
+            </a:r>
+          </a:p>
+        </p:txBody>
+      </p:sp>
     </p:spTree>
   </p:cSld>
   <p:clrMapOvr>
@@ -4137,6 +4487,76 @@
           </a:p>
         </p:txBody>
       </p:sp>
+      <p:sp>
+        <p:nvSpPr>
+          <p:cNvPr id="4" name="TextBox 3"/>
+          <p:cNvSpPr txBox="1"/>
+          <p:nvPr/>
+        </p:nvSpPr>
+        <p:spPr>
+          <a:xfrm>
+            <a:off x="640080" y="4128516"/>
+            <a:ext cx="10911535" cy="310896"/>
+          </a:xfrm>
+          <a:prstGeom prst="rect">
+            <a:avLst/>
+          </a:prstGeom>
+          <a:noFill/>
+        </p:spPr>
+        <p:txBody>
+          <a:bodyPr wrap="square">
+            <a:spAutoFit/>
+          </a:bodyPr>
+          <a:lstStyle/>
+          <a:p>
+            <a:pPr algn="ctr"/>
+            <a:r>
+              <a:rPr sz="2000" b="0" i="0">
+                <a:solidFill>
+                  <a:srgbClr val="828282"/>
+                </a:solidFill>
+                <a:latin typeface="Arial"/>
+              </a:rPr>
+              <a:t>あなたの名前に叫びます</a:t>
+            </a:r>
+          </a:p>
+        </p:txBody>
+      </p:sp>
+      <p:sp>
+        <p:nvSpPr>
+          <p:cNvPr id="5" name="TextBox 4"/>
+          <p:cNvSpPr txBox="1"/>
+          <p:nvPr/>
+        </p:nvSpPr>
+        <p:spPr>
+          <a:xfrm>
+            <a:off x="640080" y="4494276"/>
+            <a:ext cx="10911535" cy="310896"/>
+          </a:xfrm>
+          <a:prstGeom prst="rect">
+            <a:avLst/>
+          </a:prstGeom>
+          <a:noFill/>
+        </p:spPr>
+        <p:txBody>
+          <a:bodyPr wrap="square">
+            <a:spAutoFit/>
+          </a:bodyPr>
+          <a:lstStyle/>
+          <a:p>
+            <a:pPr algn="ctr"/>
+            <a:r>
+              <a:rPr sz="2000" b="0" i="0">
+                <a:solidFill>
+                  <a:srgbClr val="828282"/>
+                </a:solidFill>
+                <a:latin typeface="Arial"/>
+              </a:rPr>
+              <a:t>波を超えて見つめます</a:t>
+            </a:r>
+          </a:p>
+        </p:txBody>
+      </p:sp>
     </p:spTree>
   </p:cSld>
   <p:clrMapOvr>
@@ -4233,6 +4653,76 @@
           </a:p>
         </p:txBody>
       </p:sp>
+      <p:sp>
+        <p:nvSpPr>
+          <p:cNvPr id="4" name="TextBox 3"/>
+          <p:cNvSpPr txBox="1"/>
+          <p:nvPr/>
+        </p:nvSpPr>
+        <p:spPr>
+          <a:xfrm>
+            <a:off x="640080" y="4128516"/>
+            <a:ext cx="10911535" cy="310896"/>
+          </a:xfrm>
+          <a:prstGeom prst="rect">
+            <a:avLst/>
+          </a:prstGeom>
+          <a:noFill/>
+        </p:spPr>
+        <p:txBody>
+          <a:bodyPr wrap="square">
+            <a:spAutoFit/>
+          </a:bodyPr>
+          <a:lstStyle/>
+          <a:p>
+            <a:pPr algn="ctr"/>
+            <a:r>
+              <a:rPr sz="2000" b="0" i="0">
+                <a:solidFill>
+                  <a:srgbClr val="828282"/>
+                </a:solidFill>
+                <a:latin typeface="Arial"/>
+              </a:rPr>
+              <a:t>もし海が増し増しになっても</a:t>
+            </a:r>
+          </a:p>
+        </p:txBody>
+      </p:sp>
+      <p:sp>
+        <p:nvSpPr>
+          <p:cNvPr id="5" name="TextBox 4"/>
+          <p:cNvSpPr txBox="1"/>
+          <p:nvPr/>
+        </p:nvSpPr>
+        <p:spPr>
+          <a:xfrm>
+            <a:off x="640080" y="4494276"/>
+            <a:ext cx="10911535" cy="310896"/>
+          </a:xfrm>
+          <a:prstGeom prst="rect">
+            <a:avLst/>
+          </a:prstGeom>
+          <a:noFill/>
+        </p:spPr>
+        <p:txBody>
+          <a:bodyPr wrap="square">
+            <a:spAutoFit/>
+          </a:bodyPr>
+          <a:lstStyle/>
+          <a:p>
+            <a:pPr algn="ctr"/>
+            <a:r>
+              <a:rPr sz="2000" b="0" i="0">
+                <a:solidFill>
+                  <a:srgbClr val="828282"/>
+                </a:solidFill>
+                <a:latin typeface="Arial"/>
+              </a:rPr>
+              <a:t>あなたの中にのみ安らぎます</a:t>
+            </a:r>
+          </a:p>
+        </p:txBody>
+      </p:sp>
     </p:spTree>
   </p:cSld>
   <p:clrMapOvr>
@@ -4329,6 +4819,76 @@
           </a:p>
         </p:txBody>
       </p:sp>
+      <p:sp>
+        <p:nvSpPr>
+          <p:cNvPr id="4" name="TextBox 3"/>
+          <p:cNvSpPr txBox="1"/>
+          <p:nvPr/>
+        </p:nvSpPr>
+        <p:spPr>
+          <a:xfrm>
+            <a:off x="640080" y="4128516"/>
+            <a:ext cx="10911535" cy="310896"/>
+          </a:xfrm>
+          <a:prstGeom prst="rect">
+            <a:avLst/>
+          </a:prstGeom>
+          <a:noFill/>
+        </p:spPr>
+        <p:txBody>
+          <a:bodyPr wrap="square">
+            <a:spAutoFit/>
+          </a:bodyPr>
+          <a:lstStyle/>
+          <a:p>
+            <a:pPr algn="ctr"/>
+            <a:r>
+              <a:rPr sz="2000" b="0" i="0">
+                <a:solidFill>
+                  <a:srgbClr val="828282"/>
+                </a:solidFill>
+                <a:latin typeface="Arial"/>
+              </a:rPr>
+              <a:t>私はあなたのもの、あなたは私のもの</a:t>
+            </a:r>
+          </a:p>
+        </p:txBody>
+      </p:sp>
+      <p:sp>
+        <p:nvSpPr>
+          <p:cNvPr id="5" name="TextBox 4"/>
+          <p:cNvSpPr txBox="1"/>
+          <p:nvPr/>
+        </p:nvSpPr>
+        <p:spPr>
+          <a:xfrm>
+            <a:off x="640080" y="4494276"/>
+            <a:ext cx="10911535" cy="310896"/>
+          </a:xfrm>
+          <a:prstGeom prst="rect">
+            <a:avLst/>
+          </a:prstGeom>
+          <a:noFill/>
+        </p:spPr>
+        <p:txBody>
+          <a:bodyPr wrap="square">
+            <a:spAutoFit/>
+          </a:bodyPr>
+          <a:lstStyle/>
+          <a:p>
+            <a:pPr algn="ctr"/>
+            <a:r>
+              <a:rPr sz="2000" b="0" i="0">
+                <a:solidFill>
+                  <a:srgbClr val="828282"/>
+                </a:solidFill>
+                <a:latin typeface="Arial"/>
+              </a:rPr>
+              <a:t>すべてであなたを信じるよう私を導いてください</a:t>
+            </a:r>
+          </a:p>
+        </p:txBody>
+      </p:sp>
     </p:spTree>
   </p:cSld>
   <p:clrMapOvr>
@@ -4661,6 +5221,76 @@
           </a:p>
         </p:txBody>
       </p:sp>
+      <p:sp>
+        <p:nvSpPr>
+          <p:cNvPr id="4" name="TextBox 3"/>
+          <p:cNvSpPr txBox="1"/>
+          <p:nvPr/>
+        </p:nvSpPr>
+        <p:spPr>
+          <a:xfrm>
+            <a:off x="640080" y="4128516"/>
+            <a:ext cx="10911535" cy="310896"/>
+          </a:xfrm>
+          <a:prstGeom prst="rect">
+            <a:avLst/>
+          </a:prstGeom>
+          <a:noFill/>
+        </p:spPr>
+        <p:txBody>
+          <a:bodyPr wrap="square">
+            <a:spAutoFit/>
+          </a:bodyPr>
+          <a:lstStyle/>
+          <a:p>
+            <a:pPr algn="ctr"/>
+            <a:r>
+              <a:rPr sz="2000" b="0" i="0">
+                <a:solidFill>
+                  <a:srgbClr val="828282"/>
+                </a:solidFill>
+                <a:latin typeface="Arial"/>
+              </a:rPr>
+              <a:t>そこであなたを神秘の中で見つける</a:t>
+            </a:r>
+          </a:p>
+        </p:txBody>
+      </p:sp>
+      <p:sp>
+        <p:nvSpPr>
+          <p:cNvPr id="5" name="TextBox 4"/>
+          <p:cNvSpPr txBox="1"/>
+          <p:nvPr/>
+        </p:nvSpPr>
+        <p:spPr>
+          <a:xfrm>
+            <a:off x="640080" y="4494276"/>
+            <a:ext cx="10911535" cy="310896"/>
+          </a:xfrm>
+          <a:prstGeom prst="rect">
+            <a:avLst/>
+          </a:prstGeom>
+          <a:noFill/>
+        </p:spPr>
+        <p:txBody>
+          <a:bodyPr wrap="square">
+            <a:spAutoFit/>
+          </a:bodyPr>
+          <a:lstStyle/>
+          <a:p>
+            <a:pPr algn="ctr"/>
+            <a:r>
+              <a:rPr sz="2000" b="0" i="0">
+                <a:solidFill>
+                  <a:srgbClr val="828282"/>
+                </a:solidFill>
+                <a:latin typeface="Arial"/>
+              </a:rPr>
+              <a:t>海の中で、あなたを信じます</a:t>
+            </a:r>
+          </a:p>
+        </p:txBody>
+      </p:sp>
     </p:spTree>
   </p:cSld>
   <p:clrMapOvr>
@@ -5089,6 +5719,41 @@
           </a:p>
         </p:txBody>
       </p:sp>
+      <p:sp>
+        <p:nvSpPr>
+          <p:cNvPr id="5" name="TextBox 4"/>
+          <p:cNvSpPr txBox="1"/>
+          <p:nvPr/>
+        </p:nvSpPr>
+        <p:spPr>
+          <a:xfrm>
+            <a:off x="640080" y="4494276"/>
+            <a:ext cx="10911535" cy="310896"/>
+          </a:xfrm>
+          <a:prstGeom prst="rect">
+            <a:avLst/>
+          </a:prstGeom>
+          <a:noFill/>
+        </p:spPr>
+        <p:txBody>
+          <a:bodyPr wrap="square">
+            <a:spAutoFit/>
+          </a:bodyPr>
+          <a:lstStyle/>
+          <a:p>
+            <a:pPr algn="ctr"/>
+            <a:r>
+              <a:rPr sz="2000" b="0" i="0">
+                <a:solidFill>
+                  <a:srgbClr val="828282"/>
+                </a:solidFill>
+                <a:latin typeface="Arial"/>
+              </a:rPr>
+              <a:t>あなたの中にのみ安らぎます</a:t>
+            </a:r>
+          </a:p>
+        </p:txBody>
+      </p:sp>
     </p:spTree>
   </p:cSld>
   <p:clrMapOvr>
@@ -5150,6 +5815,41 @@
           </a:p>
         </p:txBody>
       </p:sp>
+      <p:sp>
+        <p:nvSpPr>
+          <p:cNvPr id="3" name="TextBox 2"/>
+          <p:cNvSpPr txBox="1"/>
+          <p:nvPr/>
+        </p:nvSpPr>
+        <p:spPr>
+          <a:xfrm>
+            <a:off x="640080" y="3845052"/>
+            <a:ext cx="10911535" cy="310896"/>
+          </a:xfrm>
+          <a:prstGeom prst="rect">
+            <a:avLst/>
+          </a:prstGeom>
+          <a:noFill/>
+        </p:spPr>
+        <p:txBody>
+          <a:bodyPr wrap="square">
+            <a:spAutoFit/>
+          </a:bodyPr>
+          <a:lstStyle/>
+          <a:p>
+            <a:pPr algn="ctr"/>
+            <a:r>
+              <a:rPr sz="2000" b="0" i="0">
+                <a:solidFill>
+                  <a:srgbClr val="828282"/>
+                </a:solidFill>
+                <a:latin typeface="Arial"/>
+              </a:rPr>
+              <a:t>私はあなたのもの、あなたは私のもの</a:t>
+            </a:r>
+          </a:p>
+        </p:txBody>
+      </p:sp>
     </p:spTree>
   </p:cSld>
   <p:clrMapOvr>
@@ -5447,6 +6147,41 @@
           </a:p>
         </p:txBody>
       </p:sp>
+      <p:sp>
+        <p:nvSpPr>
+          <p:cNvPr id="5" name="TextBox 4"/>
+          <p:cNvSpPr txBox="1"/>
+          <p:nvPr/>
+        </p:nvSpPr>
+        <p:spPr>
+          <a:xfrm>
+            <a:off x="640080" y="4494276"/>
+            <a:ext cx="10911535" cy="310896"/>
+          </a:xfrm>
+          <a:prstGeom prst="rect">
+            <a:avLst/>
+          </a:prstGeom>
+          <a:noFill/>
+        </p:spPr>
+        <p:txBody>
+          <a:bodyPr wrap="square">
+            <a:spAutoFit/>
+          </a:bodyPr>
+          <a:lstStyle/>
+          <a:p>
+            <a:pPr algn="ctr"/>
+            <a:r>
+              <a:rPr sz="2000" b="0" i="0">
+                <a:solidFill>
+                  <a:srgbClr val="828282"/>
+                </a:solidFill>
+                <a:latin typeface="Arial"/>
+              </a:rPr>
+              <a:t>あなたの中にのみ安らぎます</a:t>
+            </a:r>
+          </a:p>
+        </p:txBody>
+      </p:sp>
     </p:spTree>
   </p:cSld>
   <p:clrMapOvr>
@@ -5508,6 +6243,41 @@
           </a:p>
         </p:txBody>
       </p:sp>
+      <p:sp>
+        <p:nvSpPr>
+          <p:cNvPr id="3" name="TextBox 2"/>
+          <p:cNvSpPr txBox="1"/>
+          <p:nvPr/>
+        </p:nvSpPr>
+        <p:spPr>
+          <a:xfrm>
+            <a:off x="640080" y="3845052"/>
+            <a:ext cx="10911535" cy="310896"/>
+          </a:xfrm>
+          <a:prstGeom prst="rect">
+            <a:avLst/>
+          </a:prstGeom>
+          <a:noFill/>
+        </p:spPr>
+        <p:txBody>
+          <a:bodyPr wrap="square">
+            <a:spAutoFit/>
+          </a:bodyPr>
+          <a:lstStyle/>
+          <a:p>
+            <a:pPr algn="ctr"/>
+            <a:r>
+              <a:rPr sz="2000" b="0" i="0">
+                <a:solidFill>
+                  <a:srgbClr val="828282"/>
+                </a:solidFill>
+                <a:latin typeface="Arial"/>
+              </a:rPr>
+              <a:t>私はあなたのもの、あなたは私のもの</a:t>
+            </a:r>
+          </a:p>
+        </p:txBody>
+      </p:sp>
     </p:spTree>
   </p:cSld>
   <p:clrMapOvr>
@@ -5600,6 +6370,76 @@
                 <a:latin typeface="Arial"/>
               </a:rPr>
               <a:t>Tu és fiel, nunca vais falhar</a:t>
+            </a:r>
+          </a:p>
+        </p:txBody>
+      </p:sp>
+      <p:sp>
+        <p:nvSpPr>
+          <p:cNvPr id="4" name="TextBox 3"/>
+          <p:cNvSpPr txBox="1"/>
+          <p:nvPr/>
+        </p:nvSpPr>
+        <p:spPr>
+          <a:xfrm>
+            <a:off x="640080" y="4128516"/>
+            <a:ext cx="10911535" cy="310896"/>
+          </a:xfrm>
+          <a:prstGeom prst="rect">
+            <a:avLst/>
+          </a:prstGeom>
+          <a:noFill/>
+        </p:spPr>
+        <p:txBody>
+          <a:bodyPr wrap="square">
+            <a:spAutoFit/>
+          </a:bodyPr>
+          <a:lstStyle/>
+          <a:p>
+            <a:pPr algn="ctr"/>
+            <a:r>
+              <a:rPr sz="2000" b="0" i="0">
+                <a:solidFill>
+                  <a:srgbClr val="828282"/>
+                </a:solidFill>
+                <a:latin typeface="Arial"/>
+              </a:rPr>
+              <a:t>もし恐れに囲まれていても</a:t>
+            </a:r>
+          </a:p>
+        </p:txBody>
+      </p:sp>
+      <p:sp>
+        <p:nvSpPr>
+          <p:cNvPr id="5" name="TextBox 4"/>
+          <p:cNvSpPr txBox="1"/>
+          <p:nvPr/>
+        </p:nvSpPr>
+        <p:spPr>
+          <a:xfrm>
+            <a:off x="640080" y="4494276"/>
+            <a:ext cx="10911535" cy="310896"/>
+          </a:xfrm>
+          <a:prstGeom prst="rect">
+            <a:avLst/>
+          </a:prstGeom>
+          <a:noFill/>
+        </p:spPr>
+        <p:txBody>
+          <a:bodyPr wrap="square">
+            <a:spAutoFit/>
+          </a:bodyPr>
+          <a:lstStyle/>
+          <a:p>
+            <a:pPr algn="ctr"/>
+            <a:r>
+              <a:rPr sz="2000" b="0" i="0">
+                <a:solidFill>
+                  <a:srgbClr val="828282"/>
+                </a:solidFill>
+                <a:latin typeface="Arial"/>
+              </a:rPr>
+              <a:t>あなたは真実で、決して失敗しない</a:t>
             </a:r>
           </a:p>
         </p:txBody>
